--- a/_part_1/_figures/104-verkettung.pptx
+++ b/_part_1/_figures/104-verkettung.pptx
@@ -243,7 +243,7 @@
           <a:p>
             <a:fld id="{20535209-1814-487F-A442-B092F3359FD7}" type="datetimeFigureOut">
               <a:rPr lang="de-DE" smtClean="0"/>
-              <a:t>24.09.2024</a:t>
+              <a:t>04.10.2025</a:t>
             </a:fld>
             <a:endParaRPr lang="de-DE"/>
           </a:p>
@@ -413,7 +413,7 @@
           <a:p>
             <a:fld id="{20535209-1814-487F-A442-B092F3359FD7}" type="datetimeFigureOut">
               <a:rPr lang="de-DE" smtClean="0"/>
-              <a:t>24.09.2024</a:t>
+              <a:t>04.10.2025</a:t>
             </a:fld>
             <a:endParaRPr lang="de-DE"/>
           </a:p>
@@ -593,7 +593,7 @@
           <a:p>
             <a:fld id="{20535209-1814-487F-A442-B092F3359FD7}" type="datetimeFigureOut">
               <a:rPr lang="de-DE" smtClean="0"/>
-              <a:t>24.09.2024</a:t>
+              <a:t>04.10.2025</a:t>
             </a:fld>
             <a:endParaRPr lang="de-DE"/>
           </a:p>
@@ -763,7 +763,7 @@
           <a:p>
             <a:fld id="{20535209-1814-487F-A442-B092F3359FD7}" type="datetimeFigureOut">
               <a:rPr lang="de-DE" smtClean="0"/>
-              <a:t>24.09.2024</a:t>
+              <a:t>04.10.2025</a:t>
             </a:fld>
             <a:endParaRPr lang="de-DE"/>
           </a:p>
@@ -1009,7 +1009,7 @@
           <a:p>
             <a:fld id="{20535209-1814-487F-A442-B092F3359FD7}" type="datetimeFigureOut">
               <a:rPr lang="de-DE" smtClean="0"/>
-              <a:t>24.09.2024</a:t>
+              <a:t>04.10.2025</a:t>
             </a:fld>
             <a:endParaRPr lang="de-DE"/>
           </a:p>
@@ -1241,7 +1241,7 @@
           <a:p>
             <a:fld id="{20535209-1814-487F-A442-B092F3359FD7}" type="datetimeFigureOut">
               <a:rPr lang="de-DE" smtClean="0"/>
-              <a:t>24.09.2024</a:t>
+              <a:t>04.10.2025</a:t>
             </a:fld>
             <a:endParaRPr lang="de-DE"/>
           </a:p>
@@ -1608,7 +1608,7 @@
           <a:p>
             <a:fld id="{20535209-1814-487F-A442-B092F3359FD7}" type="datetimeFigureOut">
               <a:rPr lang="de-DE" smtClean="0"/>
-              <a:t>24.09.2024</a:t>
+              <a:t>04.10.2025</a:t>
             </a:fld>
             <a:endParaRPr lang="de-DE"/>
           </a:p>
@@ -1726,7 +1726,7 @@
           <a:p>
             <a:fld id="{20535209-1814-487F-A442-B092F3359FD7}" type="datetimeFigureOut">
               <a:rPr lang="de-DE" smtClean="0"/>
-              <a:t>24.09.2024</a:t>
+              <a:t>04.10.2025</a:t>
             </a:fld>
             <a:endParaRPr lang="de-DE"/>
           </a:p>
@@ -1821,7 +1821,7 @@
           <a:p>
             <a:fld id="{20535209-1814-487F-A442-B092F3359FD7}" type="datetimeFigureOut">
               <a:rPr lang="de-DE" smtClean="0"/>
-              <a:t>24.09.2024</a:t>
+              <a:t>04.10.2025</a:t>
             </a:fld>
             <a:endParaRPr lang="de-DE"/>
           </a:p>
@@ -2098,7 +2098,7 @@
           <a:p>
             <a:fld id="{20535209-1814-487F-A442-B092F3359FD7}" type="datetimeFigureOut">
               <a:rPr lang="de-DE" smtClean="0"/>
-              <a:t>24.09.2024</a:t>
+              <a:t>04.10.2025</a:t>
             </a:fld>
             <a:endParaRPr lang="de-DE"/>
           </a:p>
@@ -2355,7 +2355,7 @@
           <a:p>
             <a:fld id="{20535209-1814-487F-A442-B092F3359FD7}" type="datetimeFigureOut">
               <a:rPr lang="de-DE" smtClean="0"/>
-              <a:t>24.09.2024</a:t>
+              <a:t>04.10.2025</a:t>
             </a:fld>
             <a:endParaRPr lang="de-DE"/>
           </a:p>
@@ -2568,7 +2568,7 @@
           <a:p>
             <a:fld id="{20535209-1814-487F-A442-B092F3359FD7}" type="datetimeFigureOut">
               <a:rPr lang="de-DE" smtClean="0"/>
-              <a:t>24.09.2024</a:t>
+              <a:t>04.10.2025</a:t>
             </a:fld>
             <a:endParaRPr lang="de-DE"/>
           </a:p>
@@ -2973,1130 +2973,1051 @@
           <a:chExt cx="0" cy="0"/>
         </a:xfrm>
       </p:grpSpPr>
-      <p:grpSp>
-        <p:nvGrpSpPr>
-          <p:cNvPr id="116" name="Gruppieren 115">
+      <p:sp>
+        <p:nvSpPr>
+          <p:cNvPr id="22" name="Ellipse 21">
             <a:extLst>
               <a:ext uri="{FF2B5EF4-FFF2-40B4-BE49-F238E27FC236}">
-                <a16:creationId xmlns:a16="http://schemas.microsoft.com/office/drawing/2014/main" id="{0758AF81-6088-1600-57CC-AA24E3FD5C16}"/>
+                <a16:creationId xmlns:a16="http://schemas.microsoft.com/office/drawing/2014/main" id="{EBD8888C-D689-165A-F71E-FFCB1756617B}"/>
               </a:ext>
             </a:extLst>
           </p:cNvPr>
-          <p:cNvGrpSpPr/>
+          <p:cNvSpPr/>
           <p:nvPr/>
-        </p:nvGrpSpPr>
-        <p:grpSpPr>
+        </p:nvSpPr>
+        <p:spPr>
           <a:xfrm>
-            <a:off x="-821466" y="109636"/>
-            <a:ext cx="4221378" cy="3061064"/>
-            <a:chOff x="-946498" y="811747"/>
-            <a:chExt cx="4221378" cy="3061064"/>
+            <a:off x="2402159" y="1723189"/>
+            <a:ext cx="726180" cy="733777"/>
           </a:xfrm>
-        </p:grpSpPr>
-        <p:sp>
-          <p:nvSpPr>
-            <p:cNvPr id="30" name="Bogen 29">
-              <a:extLst>
-                <a:ext uri="{FF2B5EF4-FFF2-40B4-BE49-F238E27FC236}">
-                  <a16:creationId xmlns:a16="http://schemas.microsoft.com/office/drawing/2014/main" id="{E9E14337-9DEB-CBFF-D647-0DB78B38E22D}"/>
-                </a:ext>
-              </a:extLst>
-            </p:cNvPr>
-            <p:cNvSpPr/>
-            <p:nvPr/>
-          </p:nvSpPr>
-          <p:spPr>
-            <a:xfrm>
-              <a:off x="-946498" y="1188420"/>
-              <a:ext cx="3685822" cy="2684391"/>
-            </a:xfrm>
-            <a:prstGeom prst="arc">
-              <a:avLst>
-                <a:gd name="adj1" fmla="val 16200000"/>
-                <a:gd name="adj2" fmla="val 239328"/>
-              </a:avLst>
-            </a:prstGeom>
-            <a:ln w="3175">
-              <a:solidFill>
-                <a:schemeClr val="tx1"/>
-              </a:solidFill>
-              <a:headEnd type="none" w="med" len="med"/>
-              <a:tailEnd type="triangle" w="med" len="med"/>
-            </a:ln>
-          </p:spPr>
-          <p:style>
-            <a:lnRef idx="2">
-              <a:schemeClr val="accent1"/>
-            </a:lnRef>
-            <a:fillRef idx="0">
-              <a:schemeClr val="accent1"/>
-            </a:fillRef>
-            <a:effectRef idx="1">
-              <a:schemeClr val="accent1"/>
-            </a:effectRef>
-            <a:fontRef idx="minor">
+          <a:prstGeom prst="ellipse">
+            <a:avLst/>
+          </a:prstGeom>
+          <a:solidFill>
+            <a:schemeClr val="bg1"/>
+          </a:solidFill>
+          <a:ln w="3175">
+            <a:solidFill>
               <a:schemeClr val="tx1"/>
-            </a:fontRef>
-          </p:style>
-          <p:txBody>
-            <a:bodyPr rtlCol="0" anchor="ctr"/>
-            <a:lstStyle/>
-            <a:p>
-              <a:pPr algn="ctr"/>
-              <a:endParaRPr lang="de-DE"/>
-            </a:p>
-          </p:txBody>
-        </p:sp>
-        <p:grpSp>
-          <p:nvGrpSpPr>
-            <p:cNvPr id="109" name="Gruppieren 108">
-              <a:extLst>
-                <a:ext uri="{FF2B5EF4-FFF2-40B4-BE49-F238E27FC236}">
-                  <a16:creationId xmlns:a16="http://schemas.microsoft.com/office/drawing/2014/main" id="{CE59B2DD-F65C-0C91-F33A-5B8CC250B3DC}"/>
-                </a:ext>
-              </a:extLst>
-            </p:cNvPr>
-            <p:cNvGrpSpPr/>
-            <p:nvPr/>
-          </p:nvGrpSpPr>
-          <p:grpSpPr>
-            <a:xfrm>
-              <a:off x="102187" y="811747"/>
-              <a:ext cx="3172693" cy="2380858"/>
-              <a:chOff x="102187" y="811747"/>
-              <a:chExt cx="3172693" cy="2380858"/>
-            </a:xfrm>
-          </p:grpSpPr>
+            </a:solidFill>
+          </a:ln>
+        </p:spPr>
+        <p:style>
+          <a:lnRef idx="2">
+            <a:schemeClr val="accent1">
+              <a:shade val="15000"/>
+            </a:schemeClr>
+          </a:lnRef>
+          <a:fillRef idx="1">
+            <a:schemeClr val="accent1"/>
+          </a:fillRef>
+          <a:effectRef idx="0">
+            <a:schemeClr val="accent1"/>
+          </a:effectRef>
+          <a:fontRef idx="minor">
+            <a:schemeClr val="lt1"/>
+          </a:fontRef>
+        </p:style>
+        <p:txBody>
+          <a:bodyPr rtlCol="0" anchor="ctr"/>
+          <a:lstStyle/>
+          <a:p>
+            <a:pPr algn="ctr"/>
+            <a:endParaRPr lang="de-DE"/>
+          </a:p>
+        </p:txBody>
+      </p:sp>
+      <p:sp>
+        <p:nvSpPr>
+          <p:cNvPr id="21" name="Ellipse 20">
+            <a:extLst>
+              <a:ext uri="{FF2B5EF4-FFF2-40B4-BE49-F238E27FC236}">
+                <a16:creationId xmlns:a16="http://schemas.microsoft.com/office/drawing/2014/main" id="{E81CF6A9-F6FC-87DA-467A-2F40B162EAA2}"/>
+              </a:ext>
+            </a:extLst>
+          </p:cNvPr>
+          <p:cNvSpPr/>
+          <p:nvPr/>
+        </p:nvSpPr>
+        <p:spPr>
+          <a:xfrm>
+            <a:off x="1416524" y="905260"/>
+            <a:ext cx="709684" cy="733777"/>
+          </a:xfrm>
+          <a:prstGeom prst="ellipse">
+            <a:avLst/>
+          </a:prstGeom>
+          <a:solidFill>
+            <a:schemeClr val="bg1"/>
+          </a:solidFill>
+          <a:ln w="3175">
+            <a:solidFill>
+              <a:schemeClr val="tx1"/>
+            </a:solidFill>
+          </a:ln>
+        </p:spPr>
+        <p:style>
+          <a:lnRef idx="2">
+            <a:schemeClr val="accent1">
+              <a:shade val="15000"/>
+            </a:schemeClr>
+          </a:lnRef>
+          <a:fillRef idx="1">
+            <a:schemeClr val="accent1"/>
+          </a:fillRef>
+          <a:effectRef idx="0">
+            <a:schemeClr val="accent1"/>
+          </a:effectRef>
+          <a:fontRef idx="minor">
+            <a:schemeClr val="lt1"/>
+          </a:fontRef>
+        </p:style>
+        <p:txBody>
+          <a:bodyPr rtlCol="0" anchor="ctr"/>
+          <a:lstStyle/>
+          <a:p>
+            <a:pPr algn="ctr"/>
+            <a:endParaRPr lang="de-DE"/>
+          </a:p>
+        </p:txBody>
+      </p:sp>
+      <p:sp>
+        <p:nvSpPr>
+          <p:cNvPr id="2" name="Ellipse 1">
+            <a:extLst>
+              <a:ext uri="{FF2B5EF4-FFF2-40B4-BE49-F238E27FC236}">
+                <a16:creationId xmlns:a16="http://schemas.microsoft.com/office/drawing/2014/main" id="{60FF7508-5926-0A44-5FD5-1ADDCDA1EC7B}"/>
+              </a:ext>
+            </a:extLst>
+          </p:cNvPr>
+          <p:cNvSpPr/>
+          <p:nvPr/>
+        </p:nvSpPr>
+        <p:spPr>
+          <a:xfrm>
+            <a:off x="481900" y="76108"/>
+            <a:ext cx="688225" cy="733777"/>
+          </a:xfrm>
+          <a:prstGeom prst="ellipse">
+            <a:avLst/>
+          </a:prstGeom>
+          <a:solidFill>
+            <a:schemeClr val="bg1"/>
+          </a:solidFill>
+          <a:ln w="3175">
+            <a:solidFill>
+              <a:schemeClr val="tx1"/>
+            </a:solidFill>
+          </a:ln>
+        </p:spPr>
+        <p:style>
+          <a:lnRef idx="2">
+            <a:schemeClr val="accent1">
+              <a:shade val="15000"/>
+            </a:schemeClr>
+          </a:lnRef>
+          <a:fillRef idx="1">
+            <a:schemeClr val="accent1"/>
+          </a:fillRef>
+          <a:effectRef idx="0">
+            <a:schemeClr val="accent1"/>
+          </a:effectRef>
+          <a:fontRef idx="minor">
+            <a:schemeClr val="lt1"/>
+          </a:fontRef>
+        </p:style>
+        <p:txBody>
+          <a:bodyPr rtlCol="0" anchor="ctr"/>
+          <a:lstStyle/>
+          <a:p>
+            <a:pPr algn="ctr"/>
+            <a:endParaRPr lang="de-DE"/>
+          </a:p>
+        </p:txBody>
+      </p:sp>
+      <mc:AlternateContent xmlns:mc="http://schemas.openxmlformats.org/markup-compatibility/2006">
+        <mc:Choice xmlns:a14="http://schemas.microsoft.com/office/drawing/2010/main" Requires="a14">
           <p:sp>
             <p:nvSpPr>
-              <p:cNvPr id="21" name="Ellipse 20">
+              <p:cNvPr id="5" name="Textfeld 4">
                 <a:extLst>
                   <a:ext uri="{FF2B5EF4-FFF2-40B4-BE49-F238E27FC236}">
-                    <a16:creationId xmlns:a16="http://schemas.microsoft.com/office/drawing/2014/main" id="{E81CF6A9-F6FC-87DA-467A-2F40B162EAA2}"/>
+                    <a16:creationId xmlns:a16="http://schemas.microsoft.com/office/drawing/2014/main" id="{C6CFA671-756B-97E6-38D9-D7F5368DCD08}"/>
                   </a:ext>
                 </a:extLst>
               </p:cNvPr>
-              <p:cNvSpPr/>
+              <p:cNvSpPr txBox="1"/>
               <p:nvPr/>
             </p:nvSpPr>
             <p:spPr>
               <a:xfrm>
-                <a:off x="1352452" y="1640899"/>
-                <a:ext cx="709684" cy="733777"/>
+                <a:off x="166259" y="288245"/>
+                <a:ext cx="351827" cy="307777"/>
               </a:xfrm>
-              <a:prstGeom prst="ellipse">
+              <a:prstGeom prst="rect">
                 <a:avLst/>
               </a:prstGeom>
-              <a:solidFill>
-                <a:schemeClr val="bg1"/>
-              </a:solidFill>
-              <a:ln w="3175">
-                <a:solidFill>
-                  <a:schemeClr val="tx1"/>
-                </a:solidFill>
-              </a:ln>
+              <a:noFill/>
             </p:spPr>
-            <p:style>
-              <a:lnRef idx="2">
-                <a:schemeClr val="accent1">
-                  <a:shade val="15000"/>
-                </a:schemeClr>
-              </a:lnRef>
-              <a:fillRef idx="1">
-                <a:schemeClr val="accent1"/>
-              </a:fillRef>
-              <a:effectRef idx="0">
-                <a:schemeClr val="accent1"/>
-              </a:effectRef>
-              <a:fontRef idx="minor">
-                <a:schemeClr val="lt1"/>
-              </a:fontRef>
-            </p:style>
             <p:txBody>
-              <a:bodyPr rtlCol="0" anchor="ctr"/>
+              <a:bodyPr wrap="square" rtlCol="0">
+                <a:spAutoFit/>
+              </a:bodyPr>
               <a:lstStyle/>
               <a:p>
-                <a:pPr algn="ctr"/>
-                <a:endParaRPr lang="de-DE"/>
+                <a:pPr/>
+                <a14:m>
+                  <m:oMathPara xmlns:m="http://schemas.openxmlformats.org/officeDocument/2006/math">
+                    <m:oMathParaPr>
+                      <m:jc m:val="centerGroup"/>
+                    </m:oMathParaPr>
+                    <m:oMath xmlns:m="http://schemas.openxmlformats.org/officeDocument/2006/math">
+                      <m:r>
+                        <a:rPr lang="de-DE" sz="1400" i="1" dirty="0">
+                          <a:latin typeface="Cambria Math" panose="02040503050406030204" pitchFamily="18" charset="0"/>
+                        </a:rPr>
+                        <m:t>𝐷</m:t>
+                      </m:r>
+                    </m:oMath>
+                  </m:oMathPara>
+                </a14:m>
+                <a:endParaRPr lang="de-DE" sz="1400" dirty="0"/>
               </a:p>
             </p:txBody>
           </p:sp>
+        </mc:Choice>
+        <mc:Fallback>
           <p:sp>
             <p:nvSpPr>
-              <p:cNvPr id="22" name="Ellipse 21">
+              <p:cNvPr id="5" name="Textfeld 4">
                 <a:extLst>
                   <a:ext uri="{FF2B5EF4-FFF2-40B4-BE49-F238E27FC236}">
-                    <a16:creationId xmlns:a16="http://schemas.microsoft.com/office/drawing/2014/main" id="{EBD8888C-D689-165A-F71E-FFCB1756617B}"/>
+                    <a16:creationId xmlns:a16="http://schemas.microsoft.com/office/drawing/2014/main" id="{C6CFA671-756B-97E6-38D9-D7F5368DCD08}"/>
                   </a:ext>
                 </a:extLst>
               </p:cNvPr>
-              <p:cNvSpPr/>
+              <p:cNvSpPr txBox="1">
+                <a:spLocks noRot="1" noChangeAspect="1" noMove="1" noResize="1" noEditPoints="1" noAdjustHandles="1" noChangeArrowheads="1" noChangeShapeType="1" noTextEdit="1"/>
+              </p:cNvSpPr>
               <p:nvPr/>
             </p:nvSpPr>
             <p:spPr>
               <a:xfrm>
-                <a:off x="2338087" y="2458828"/>
-                <a:ext cx="726180" cy="733777"/>
+                <a:off x="166259" y="288245"/>
+                <a:ext cx="351827" cy="307777"/>
               </a:xfrm>
-              <a:prstGeom prst="ellipse">
+              <a:prstGeom prst="rect">
                 <a:avLst/>
               </a:prstGeom>
-              <a:solidFill>
-                <a:schemeClr val="bg1"/>
-              </a:solidFill>
-              <a:ln w="3175">
-                <a:solidFill>
-                  <a:schemeClr val="tx1"/>
-                </a:solidFill>
-              </a:ln>
+              <a:blipFill>
+                <a:blip r:embed="rId2"/>
+                <a:stretch>
+                  <a:fillRect/>
+                </a:stretch>
+              </a:blipFill>
             </p:spPr>
-            <p:style>
-              <a:lnRef idx="2">
-                <a:schemeClr val="accent1">
-                  <a:shade val="15000"/>
-                </a:schemeClr>
-              </a:lnRef>
-              <a:fillRef idx="1">
-                <a:schemeClr val="accent1"/>
-              </a:fillRef>
-              <a:effectRef idx="0">
-                <a:schemeClr val="accent1"/>
-              </a:effectRef>
-              <a:fontRef idx="minor">
-                <a:schemeClr val="lt1"/>
-              </a:fontRef>
-            </p:style>
             <p:txBody>
-              <a:bodyPr rtlCol="0" anchor="ctr"/>
+              <a:bodyPr/>
               <a:lstStyle/>
               <a:p>
-                <a:pPr algn="ctr"/>
-                <a:endParaRPr lang="de-DE"/>
+                <a:r>
+                  <a:rPr lang="de-DE">
+                    <a:noFill/>
+                  </a:rPr>
+                  <a:t> </a:t>
+                </a:r>
               </a:p>
             </p:txBody>
           </p:sp>
+        </mc:Fallback>
+      </mc:AlternateContent>
+      <mc:AlternateContent xmlns:mc="http://schemas.openxmlformats.org/markup-compatibility/2006">
+        <mc:Choice xmlns:a14="http://schemas.microsoft.com/office/drawing/2010/main" Requires="a14">
           <p:sp>
             <p:nvSpPr>
-              <p:cNvPr id="2" name="Ellipse 1">
+              <p:cNvPr id="6" name="Textfeld 5">
                 <a:extLst>
                   <a:ext uri="{FF2B5EF4-FFF2-40B4-BE49-F238E27FC236}">
-                    <a16:creationId xmlns:a16="http://schemas.microsoft.com/office/drawing/2014/main" id="{60FF7508-5926-0A44-5FD5-1ADDCDA1EC7B}"/>
+                    <a16:creationId xmlns:a16="http://schemas.microsoft.com/office/drawing/2014/main" id="{C75E9E40-09CD-65CA-C565-CA85A867BB5F}"/>
                   </a:ext>
                 </a:extLst>
               </p:cNvPr>
-              <p:cNvSpPr/>
+              <p:cNvSpPr txBox="1"/>
               <p:nvPr/>
             </p:nvSpPr>
             <p:spPr>
               <a:xfrm>
-                <a:off x="417828" y="811747"/>
-                <a:ext cx="688225" cy="733777"/>
+                <a:off x="1038318" y="1103847"/>
+                <a:ext cx="331694" cy="307777"/>
               </a:xfrm>
-              <a:prstGeom prst="ellipse">
+              <a:prstGeom prst="rect">
                 <a:avLst/>
               </a:prstGeom>
-              <a:solidFill>
-                <a:schemeClr val="bg1"/>
-              </a:solidFill>
-              <a:ln w="3175">
-                <a:solidFill>
-                  <a:schemeClr val="tx1"/>
-                </a:solidFill>
-              </a:ln>
+              <a:noFill/>
             </p:spPr>
-            <p:style>
-              <a:lnRef idx="2">
-                <a:schemeClr val="accent1">
-                  <a:shade val="15000"/>
-                </a:schemeClr>
-              </a:lnRef>
-              <a:fillRef idx="1">
-                <a:schemeClr val="accent1"/>
-              </a:fillRef>
-              <a:effectRef idx="0">
-                <a:schemeClr val="accent1"/>
-              </a:effectRef>
-              <a:fontRef idx="minor">
-                <a:schemeClr val="lt1"/>
-              </a:fontRef>
-            </p:style>
             <p:txBody>
-              <a:bodyPr rtlCol="0" anchor="ctr"/>
+              <a:bodyPr wrap="square" rtlCol="0">
+                <a:spAutoFit/>
+              </a:bodyPr>
               <a:lstStyle/>
               <a:p>
-                <a:pPr algn="ctr"/>
-                <a:endParaRPr lang="de-DE"/>
+                <a:pPr/>
+                <a14:m>
+                  <m:oMathPara xmlns:m="http://schemas.openxmlformats.org/officeDocument/2006/math">
+                    <m:oMathParaPr>
+                      <m:jc m:val="centerGroup"/>
+                    </m:oMathParaPr>
+                    <m:oMath xmlns:m="http://schemas.openxmlformats.org/officeDocument/2006/math">
+                      <m:r>
+                        <a:rPr lang="de-DE" sz="1400" i="1" dirty="0">
+                          <a:latin typeface="Cambria Math" panose="02040503050406030204" pitchFamily="18" charset="0"/>
+                        </a:rPr>
+                        <m:t>𝑍</m:t>
+                      </m:r>
+                    </m:oMath>
+                  </m:oMathPara>
+                </a14:m>
+                <a:endParaRPr lang="de-DE" sz="1400" dirty="0"/>
               </a:p>
             </p:txBody>
           </p:sp>
-          <mc:AlternateContent xmlns:mc="http://schemas.openxmlformats.org/markup-compatibility/2006" xmlns:a14="http://schemas.microsoft.com/office/drawing/2010/main">
-            <mc:Choice Requires="a14">
-              <p:sp>
-                <p:nvSpPr>
-                  <p:cNvPr id="5" name="Textfeld 4">
-                    <a:extLst>
-                      <a:ext uri="{FF2B5EF4-FFF2-40B4-BE49-F238E27FC236}">
-                        <a16:creationId xmlns:a16="http://schemas.microsoft.com/office/drawing/2014/main" id="{C6CFA671-756B-97E6-38D9-D7F5368DCD08}"/>
-                      </a:ext>
-                    </a:extLst>
-                  </p:cNvPr>
-                  <p:cNvSpPr txBox="1"/>
-                  <p:nvPr/>
-                </p:nvSpPr>
-                <p:spPr>
-                  <a:xfrm>
-                    <a:off x="102187" y="1023884"/>
-                    <a:ext cx="351827" cy="307777"/>
-                  </a:xfrm>
-                  <a:prstGeom prst="rect">
-                    <a:avLst/>
-                  </a:prstGeom>
-                  <a:noFill/>
-                </p:spPr>
-                <p:txBody>
-                  <a:bodyPr wrap="square" rtlCol="0">
-                    <a:spAutoFit/>
-                  </a:bodyPr>
-                  <a:lstStyle/>
-                  <a:p>
-                    <a:pPr/>
-                    <a14:m>
-                      <m:oMathPara xmlns:m="http://schemas.openxmlformats.org/officeDocument/2006/math">
-                        <m:oMathParaPr>
-                          <m:jc m:val="centerGroup"/>
-                        </m:oMathParaPr>
-                        <m:oMath xmlns:m="http://schemas.openxmlformats.org/officeDocument/2006/math">
-                          <m:r>
-                            <a:rPr lang="de-DE" sz="1400" i="1" dirty="0">
-                              <a:latin typeface="Cambria Math" panose="02040503050406030204" pitchFamily="18" charset="0"/>
-                            </a:rPr>
-                            <m:t>𝐷</m:t>
-                          </m:r>
-                        </m:oMath>
-                      </m:oMathPara>
-                    </a14:m>
-                    <a:endParaRPr lang="de-DE" sz="1400" dirty="0"/>
-                  </a:p>
-                </p:txBody>
-              </p:sp>
-            </mc:Choice>
-            <mc:Fallback xmlns="">
-              <p:sp>
-                <p:nvSpPr>
-                  <p:cNvPr id="5" name="Textfeld 4">
-                    <a:extLst>
-                      <a:ext uri="{FF2B5EF4-FFF2-40B4-BE49-F238E27FC236}">
-                        <a16:creationId xmlns:a16="http://schemas.microsoft.com/office/drawing/2014/main" id="{C6CFA671-756B-97E6-38D9-D7F5368DCD08}"/>
-                      </a:ext>
-                    </a:extLst>
-                  </p:cNvPr>
-                  <p:cNvSpPr txBox="1">
-                    <a:spLocks noRot="1" noChangeAspect="1" noMove="1" noResize="1" noEditPoints="1" noAdjustHandles="1" noChangeArrowheads="1" noChangeShapeType="1" noTextEdit="1"/>
-                  </p:cNvSpPr>
-                  <p:nvPr/>
-                </p:nvSpPr>
-                <p:spPr>
-                  <a:xfrm>
-                    <a:off x="102187" y="1023884"/>
-                    <a:ext cx="351827" cy="307777"/>
-                  </a:xfrm>
-                  <a:prstGeom prst="rect">
-                    <a:avLst/>
-                  </a:prstGeom>
-                  <a:blipFill>
-                    <a:blip r:embed="rId13"/>
-                    <a:stretch>
-                      <a:fillRect/>
-                    </a:stretch>
-                  </a:blipFill>
-                </p:spPr>
-                <p:txBody>
-                  <a:bodyPr/>
-                  <a:lstStyle/>
-                  <a:p>
-                    <a:r>
-                      <a:rPr lang="de-DE">
-                        <a:noFill/>
-                      </a:rPr>
-                      <a:t> </a:t>
-                    </a:r>
-                  </a:p>
-                </p:txBody>
-              </p:sp>
-            </mc:Fallback>
-          </mc:AlternateContent>
-          <mc:AlternateContent xmlns:mc="http://schemas.openxmlformats.org/markup-compatibility/2006" xmlns:a14="http://schemas.microsoft.com/office/drawing/2010/main">
-            <mc:Choice Requires="a14">
-              <p:sp>
-                <p:nvSpPr>
-                  <p:cNvPr id="6" name="Textfeld 5">
-                    <a:extLst>
-                      <a:ext uri="{FF2B5EF4-FFF2-40B4-BE49-F238E27FC236}">
-                        <a16:creationId xmlns:a16="http://schemas.microsoft.com/office/drawing/2014/main" id="{C75E9E40-09CD-65CA-C565-CA85A867BB5F}"/>
-                      </a:ext>
-                    </a:extLst>
-                  </p:cNvPr>
-                  <p:cNvSpPr txBox="1"/>
-                  <p:nvPr/>
-                </p:nvSpPr>
-                <p:spPr>
-                  <a:xfrm>
-                    <a:off x="974246" y="1839486"/>
-                    <a:ext cx="331694" cy="307777"/>
-                  </a:xfrm>
-                  <a:prstGeom prst="rect">
-                    <a:avLst/>
-                  </a:prstGeom>
-                  <a:noFill/>
-                </p:spPr>
-                <p:txBody>
-                  <a:bodyPr wrap="square" rtlCol="0">
-                    <a:spAutoFit/>
-                  </a:bodyPr>
-                  <a:lstStyle/>
-                  <a:p>
-                    <a:pPr/>
-                    <a14:m>
-                      <m:oMathPara xmlns:m="http://schemas.openxmlformats.org/officeDocument/2006/math">
-                        <m:oMathParaPr>
-                          <m:jc m:val="centerGroup"/>
-                        </m:oMathParaPr>
-                        <m:oMath xmlns:m="http://schemas.openxmlformats.org/officeDocument/2006/math">
-                          <m:r>
-                            <a:rPr lang="de-DE" sz="1400" i="1" dirty="0">
-                              <a:latin typeface="Cambria Math" panose="02040503050406030204" pitchFamily="18" charset="0"/>
-                            </a:rPr>
-                            <m:t>𝑍</m:t>
-                          </m:r>
-                        </m:oMath>
-                      </m:oMathPara>
-                    </a14:m>
-                    <a:endParaRPr lang="de-DE" sz="1400" dirty="0"/>
-                  </a:p>
-                </p:txBody>
-              </p:sp>
-            </mc:Choice>
-            <mc:Fallback xmlns="">
-              <p:sp>
-                <p:nvSpPr>
-                  <p:cNvPr id="6" name="Textfeld 5">
-                    <a:extLst>
-                      <a:ext uri="{FF2B5EF4-FFF2-40B4-BE49-F238E27FC236}">
-                        <a16:creationId xmlns:a16="http://schemas.microsoft.com/office/drawing/2014/main" id="{C75E9E40-09CD-65CA-C565-CA85A867BB5F}"/>
-                      </a:ext>
-                    </a:extLst>
-                  </p:cNvPr>
-                  <p:cNvSpPr txBox="1">
-                    <a:spLocks noRot="1" noChangeAspect="1" noMove="1" noResize="1" noEditPoints="1" noAdjustHandles="1" noChangeArrowheads="1" noChangeShapeType="1" noTextEdit="1"/>
-                  </p:cNvSpPr>
-                  <p:nvPr/>
-                </p:nvSpPr>
-                <p:spPr>
-                  <a:xfrm>
-                    <a:off x="974246" y="1839486"/>
-                    <a:ext cx="331694" cy="307777"/>
-                  </a:xfrm>
-                  <a:prstGeom prst="rect">
-                    <a:avLst/>
-                  </a:prstGeom>
-                  <a:blipFill>
-                    <a:blip r:embed="rId14"/>
-                    <a:stretch>
-                      <a:fillRect/>
-                    </a:stretch>
-                  </a:blipFill>
-                </p:spPr>
-                <p:txBody>
-                  <a:bodyPr/>
-                  <a:lstStyle/>
-                  <a:p>
-                    <a:r>
-                      <a:rPr lang="de-DE">
-                        <a:noFill/>
-                      </a:rPr>
-                      <a:t> </a:t>
-                    </a:r>
-                  </a:p>
-                </p:txBody>
-              </p:sp>
-            </mc:Fallback>
-          </mc:AlternateContent>
-          <mc:AlternateContent xmlns:mc="http://schemas.openxmlformats.org/markup-compatibility/2006" xmlns:a14="http://schemas.microsoft.com/office/drawing/2010/main">
-            <mc:Choice Requires="a14">
-              <p:sp>
-                <p:nvSpPr>
-                  <p:cNvPr id="8" name="Textfeld 7">
-                    <a:extLst>
-                      <a:ext uri="{FF2B5EF4-FFF2-40B4-BE49-F238E27FC236}">
-                        <a16:creationId xmlns:a16="http://schemas.microsoft.com/office/drawing/2014/main" id="{6DC89ED9-B0F2-17A5-B8BC-505A948F49F2}"/>
-                      </a:ext>
-                    </a:extLst>
-                  </p:cNvPr>
-                  <p:cNvSpPr txBox="1"/>
-                  <p:nvPr/>
-                </p:nvSpPr>
-                <p:spPr>
-                  <a:xfrm>
-                    <a:off x="1940360" y="2663343"/>
-                    <a:ext cx="331694" cy="307777"/>
-                  </a:xfrm>
-                  <a:prstGeom prst="rect">
-                    <a:avLst/>
-                  </a:prstGeom>
-                  <a:noFill/>
-                </p:spPr>
-                <p:txBody>
-                  <a:bodyPr wrap="square" rtlCol="0">
-                    <a:spAutoFit/>
-                  </a:bodyPr>
-                  <a:lstStyle/>
-                  <a:p>
-                    <a:pPr/>
-                    <a14:m>
-                      <m:oMathPara xmlns:m="http://schemas.openxmlformats.org/officeDocument/2006/math">
-                        <m:oMathParaPr>
-                          <m:jc m:val="centerGroup"/>
-                        </m:oMathParaPr>
-                        <m:oMath xmlns:m="http://schemas.openxmlformats.org/officeDocument/2006/math">
-                          <m:r>
-                            <a:rPr lang="de-DE" sz="1400" i="1" dirty="0">
-                              <a:latin typeface="Cambria Math" panose="02040503050406030204" pitchFamily="18" charset="0"/>
-                            </a:rPr>
-                            <m:t>𝑆</m:t>
-                          </m:r>
-                        </m:oMath>
-                      </m:oMathPara>
-                    </a14:m>
-                    <a:endParaRPr lang="de-DE" sz="1400" dirty="0"/>
-                  </a:p>
-                </p:txBody>
-              </p:sp>
-            </mc:Choice>
-            <mc:Fallback xmlns="">
-              <p:sp>
-                <p:nvSpPr>
-                  <p:cNvPr id="8" name="Textfeld 7">
-                    <a:extLst>
-                      <a:ext uri="{FF2B5EF4-FFF2-40B4-BE49-F238E27FC236}">
-                        <a16:creationId xmlns:a16="http://schemas.microsoft.com/office/drawing/2014/main" id="{6DC89ED9-B0F2-17A5-B8BC-505A948F49F2}"/>
-                      </a:ext>
-                    </a:extLst>
-                  </p:cNvPr>
-                  <p:cNvSpPr txBox="1">
-                    <a:spLocks noRot="1" noChangeAspect="1" noMove="1" noResize="1" noEditPoints="1" noAdjustHandles="1" noChangeArrowheads="1" noChangeShapeType="1" noTextEdit="1"/>
-                  </p:cNvSpPr>
-                  <p:nvPr/>
-                </p:nvSpPr>
-                <p:spPr>
-                  <a:xfrm>
-                    <a:off x="1940360" y="2663343"/>
-                    <a:ext cx="331694" cy="307777"/>
-                  </a:xfrm>
-                  <a:prstGeom prst="rect">
-                    <a:avLst/>
-                  </a:prstGeom>
-                  <a:blipFill>
-                    <a:blip r:embed="rId15"/>
-                    <a:stretch>
-                      <a:fillRect/>
-                    </a:stretch>
-                  </a:blipFill>
-                </p:spPr>
-                <p:txBody>
-                  <a:bodyPr/>
-                  <a:lstStyle/>
-                  <a:p>
-                    <a:r>
-                      <a:rPr lang="de-DE">
-                        <a:noFill/>
-                      </a:rPr>
-                      <a:t> </a:t>
-                    </a:r>
-                  </a:p>
-                </p:txBody>
-              </p:sp>
-            </mc:Fallback>
-          </mc:AlternateContent>
-          <p:cxnSp>
-            <p:nvCxnSpPr>
-              <p:cNvPr id="10" name="Gerade Verbindung mit Pfeil 9">
+        </mc:Choice>
+        <mc:Fallback>
+          <p:sp>
+            <p:nvSpPr>
+              <p:cNvPr id="6" name="Textfeld 5">
                 <a:extLst>
                   <a:ext uri="{FF2B5EF4-FFF2-40B4-BE49-F238E27FC236}">
-                    <a16:creationId xmlns:a16="http://schemas.microsoft.com/office/drawing/2014/main" id="{5CEEA877-5B5A-014A-ED84-7FE77112456B}"/>
+                    <a16:creationId xmlns:a16="http://schemas.microsoft.com/office/drawing/2014/main" id="{C75E9E40-09CD-65CA-C565-CA85A867BB5F}"/>
                   </a:ext>
                 </a:extLst>
               </p:cNvPr>
-              <p:cNvCxnSpPr>
-                <a:cxnSpLocks/>
-              </p:cNvCxnSpPr>
+              <p:cNvSpPr txBox="1">
+                <a:spLocks noRot="1" noChangeAspect="1" noMove="1" noResize="1" noEditPoints="1" noAdjustHandles="1" noChangeArrowheads="1" noChangeShapeType="1" noTextEdit="1"/>
+              </p:cNvSpPr>
               <p:nvPr/>
-            </p:nvCxnSpPr>
+            </p:nvSpPr>
             <p:spPr>
               <a:xfrm>
-                <a:off x="863600" y="1277132"/>
-                <a:ext cx="673597" cy="591179"/>
+                <a:off x="1038318" y="1103847"/>
+                <a:ext cx="331694" cy="307777"/>
               </a:xfrm>
-              <a:prstGeom prst="straightConnector1">
+              <a:prstGeom prst="rect">
                 <a:avLst/>
               </a:prstGeom>
-              <a:ln w="3175">
-                <a:solidFill>
-                  <a:schemeClr val="tx1"/>
-                </a:solidFill>
-                <a:tailEnd type="triangle"/>
-              </a:ln>
+              <a:blipFill>
+                <a:blip r:embed="rId3"/>
+                <a:stretch>
+                  <a:fillRect/>
+                </a:stretch>
+              </a:blipFill>
             </p:spPr>
-            <p:style>
-              <a:lnRef idx="2">
-                <a:schemeClr val="accent1"/>
-              </a:lnRef>
-              <a:fillRef idx="0">
-                <a:schemeClr val="accent1"/>
-              </a:fillRef>
-              <a:effectRef idx="1">
-                <a:schemeClr val="accent1"/>
-              </a:effectRef>
-              <a:fontRef idx="minor">
-                <a:schemeClr val="tx1"/>
-              </a:fontRef>
-            </p:style>
-          </p:cxnSp>
-          <mc:AlternateContent xmlns:mc="http://schemas.openxmlformats.org/markup-compatibility/2006" xmlns:a14="http://schemas.microsoft.com/office/drawing/2010/main">
-            <mc:Choice Requires="a14">
-              <p:sp>
-                <p:nvSpPr>
-                  <p:cNvPr id="11" name="Textfeld 10">
-                    <a:extLst>
-                      <a:ext uri="{FF2B5EF4-FFF2-40B4-BE49-F238E27FC236}">
-                        <a16:creationId xmlns:a16="http://schemas.microsoft.com/office/drawing/2014/main" id="{DCD92755-5B4A-762A-7C87-610A5BAD6BD1}"/>
-                      </a:ext>
-                    </a:extLst>
-                  </p:cNvPr>
-                  <p:cNvSpPr txBox="1"/>
-                  <p:nvPr/>
-                </p:nvSpPr>
-                <p:spPr>
-                  <a:xfrm>
-                    <a:off x="701820" y="1092466"/>
-                    <a:ext cx="118494" cy="184666"/>
-                  </a:xfrm>
-                  <a:prstGeom prst="rect">
-                    <a:avLst/>
-                  </a:prstGeom>
-                  <a:noFill/>
-                </p:spPr>
-                <p:txBody>
-                  <a:bodyPr wrap="square" lIns="0" tIns="0" rIns="0" bIns="0" rtlCol="0">
-                    <a:spAutoFit/>
-                  </a:bodyPr>
-                  <a:lstStyle/>
-                  <a:p>
-                    <a:pPr/>
-                    <a14:m>
-                      <m:oMathPara xmlns:m="http://schemas.openxmlformats.org/officeDocument/2006/math">
-                        <m:oMathParaPr>
-                          <m:jc m:val="centerGroup"/>
-                        </m:oMathParaPr>
-                        <m:oMath xmlns:m="http://schemas.openxmlformats.org/officeDocument/2006/math">
-                          <m:r>
+            <p:txBody>
+              <a:bodyPr/>
+              <a:lstStyle/>
+              <a:p>
+                <a:r>
+                  <a:rPr lang="de-DE">
+                    <a:noFill/>
+                  </a:rPr>
+                  <a:t> </a:t>
+                </a:r>
+              </a:p>
+            </p:txBody>
+          </p:sp>
+        </mc:Fallback>
+      </mc:AlternateContent>
+      <mc:AlternateContent xmlns:mc="http://schemas.openxmlformats.org/markup-compatibility/2006">
+        <mc:Choice xmlns:a14="http://schemas.microsoft.com/office/drawing/2010/main" Requires="a14">
+          <p:sp>
+            <p:nvSpPr>
+              <p:cNvPr id="8" name="Textfeld 7">
+                <a:extLst>
+                  <a:ext uri="{FF2B5EF4-FFF2-40B4-BE49-F238E27FC236}">
+                    <a16:creationId xmlns:a16="http://schemas.microsoft.com/office/drawing/2014/main" id="{6DC89ED9-B0F2-17A5-B8BC-505A948F49F2}"/>
+                  </a:ext>
+                </a:extLst>
+              </p:cNvPr>
+              <p:cNvSpPr txBox="1"/>
+              <p:nvPr/>
+            </p:nvSpPr>
+            <p:spPr>
+              <a:xfrm>
+                <a:off x="2004432" y="1927704"/>
+                <a:ext cx="331694" cy="307777"/>
+              </a:xfrm>
+              <a:prstGeom prst="rect">
+                <a:avLst/>
+              </a:prstGeom>
+              <a:noFill/>
+            </p:spPr>
+            <p:txBody>
+              <a:bodyPr wrap="square" rtlCol="0">
+                <a:spAutoFit/>
+              </a:bodyPr>
+              <a:lstStyle/>
+              <a:p>
+                <a:pPr/>
+                <a14:m>
+                  <m:oMathPara xmlns:m="http://schemas.openxmlformats.org/officeDocument/2006/math">
+                    <m:oMathParaPr>
+                      <m:jc m:val="centerGroup"/>
+                    </m:oMathParaPr>
+                    <m:oMath xmlns:m="http://schemas.openxmlformats.org/officeDocument/2006/math">
+                      <m:r>
+                        <a:rPr lang="de-DE" sz="1400" i="1" dirty="0">
+                          <a:latin typeface="Cambria Math" panose="02040503050406030204" pitchFamily="18" charset="0"/>
+                        </a:rPr>
+                        <m:t>𝑆</m:t>
+                      </m:r>
+                    </m:oMath>
+                  </m:oMathPara>
+                </a14:m>
+                <a:endParaRPr lang="de-DE" sz="1400" dirty="0"/>
+              </a:p>
+            </p:txBody>
+          </p:sp>
+        </mc:Choice>
+        <mc:Fallback>
+          <p:sp>
+            <p:nvSpPr>
+              <p:cNvPr id="8" name="Textfeld 7">
+                <a:extLst>
+                  <a:ext uri="{FF2B5EF4-FFF2-40B4-BE49-F238E27FC236}">
+                    <a16:creationId xmlns:a16="http://schemas.microsoft.com/office/drawing/2014/main" id="{6DC89ED9-B0F2-17A5-B8BC-505A948F49F2}"/>
+                  </a:ext>
+                </a:extLst>
+              </p:cNvPr>
+              <p:cNvSpPr txBox="1">
+                <a:spLocks noRot="1" noChangeAspect="1" noMove="1" noResize="1" noEditPoints="1" noAdjustHandles="1" noChangeArrowheads="1" noChangeShapeType="1" noTextEdit="1"/>
+              </p:cNvSpPr>
+              <p:nvPr/>
+            </p:nvSpPr>
+            <p:spPr>
+              <a:xfrm>
+                <a:off x="2004432" y="1927704"/>
+                <a:ext cx="331694" cy="307777"/>
+              </a:xfrm>
+              <a:prstGeom prst="rect">
+                <a:avLst/>
+              </a:prstGeom>
+              <a:blipFill>
+                <a:blip r:embed="rId4"/>
+                <a:stretch>
+                  <a:fillRect/>
+                </a:stretch>
+              </a:blipFill>
+            </p:spPr>
+            <p:txBody>
+              <a:bodyPr/>
+              <a:lstStyle/>
+              <a:p>
+                <a:r>
+                  <a:rPr lang="de-DE">
+                    <a:noFill/>
+                  </a:rPr>
+                  <a:t> </a:t>
+                </a:r>
+              </a:p>
+            </p:txBody>
+          </p:sp>
+        </mc:Fallback>
+      </mc:AlternateContent>
+      <p:cxnSp>
+        <p:nvCxnSpPr>
+          <p:cNvPr id="10" name="Gerade Verbindung mit Pfeil 9">
+            <a:extLst>
+              <a:ext uri="{FF2B5EF4-FFF2-40B4-BE49-F238E27FC236}">
+                <a16:creationId xmlns:a16="http://schemas.microsoft.com/office/drawing/2014/main" id="{5CEEA877-5B5A-014A-ED84-7FE77112456B}"/>
+              </a:ext>
+            </a:extLst>
+          </p:cNvPr>
+          <p:cNvCxnSpPr>
+            <a:cxnSpLocks/>
+          </p:cNvCxnSpPr>
+          <p:nvPr/>
+        </p:nvCxnSpPr>
+        <p:spPr>
+          <a:xfrm>
+            <a:off x="927672" y="541493"/>
+            <a:ext cx="673597" cy="591179"/>
+          </a:xfrm>
+          <a:prstGeom prst="straightConnector1">
+            <a:avLst/>
+          </a:prstGeom>
+          <a:ln w="3175">
+            <a:solidFill>
+              <a:schemeClr val="tx1"/>
+            </a:solidFill>
+            <a:tailEnd type="triangle"/>
+          </a:ln>
+        </p:spPr>
+        <p:style>
+          <a:lnRef idx="2">
+            <a:schemeClr val="accent1"/>
+          </a:lnRef>
+          <a:fillRef idx="0">
+            <a:schemeClr val="accent1"/>
+          </a:fillRef>
+          <a:effectRef idx="1">
+            <a:schemeClr val="accent1"/>
+          </a:effectRef>
+          <a:fontRef idx="minor">
+            <a:schemeClr val="tx1"/>
+          </a:fontRef>
+        </p:style>
+      </p:cxnSp>
+      <mc:AlternateContent xmlns:mc="http://schemas.openxmlformats.org/markup-compatibility/2006">
+        <mc:Choice xmlns:a14="http://schemas.microsoft.com/office/drawing/2010/main" Requires="a14">
+          <p:sp>
+            <p:nvSpPr>
+              <p:cNvPr id="11" name="Textfeld 10">
+                <a:extLst>
+                  <a:ext uri="{FF2B5EF4-FFF2-40B4-BE49-F238E27FC236}">
+                    <a16:creationId xmlns:a16="http://schemas.microsoft.com/office/drawing/2014/main" id="{DCD92755-5B4A-762A-7C87-610A5BAD6BD1}"/>
+                  </a:ext>
+                </a:extLst>
+              </p:cNvPr>
+              <p:cNvSpPr txBox="1"/>
+              <p:nvPr/>
+            </p:nvSpPr>
+            <p:spPr>
+              <a:xfrm>
+                <a:off x="765892" y="356827"/>
+                <a:ext cx="118494" cy="184666"/>
+              </a:xfrm>
+              <a:prstGeom prst="rect">
+                <a:avLst/>
+              </a:prstGeom>
+              <a:noFill/>
+            </p:spPr>
+            <p:txBody>
+              <a:bodyPr wrap="square" lIns="0" tIns="0" rIns="0" bIns="0" rtlCol="0">
+                <a:spAutoFit/>
+              </a:bodyPr>
+              <a:lstStyle/>
+              <a:p>
+                <a:pPr/>
+                <a14:m>
+                  <m:oMathPara xmlns:m="http://schemas.openxmlformats.org/officeDocument/2006/math">
+                    <m:oMathParaPr>
+                      <m:jc m:val="centerGroup"/>
+                    </m:oMathParaPr>
+                    <m:oMath xmlns:m="http://schemas.openxmlformats.org/officeDocument/2006/math">
+                      <m:r>
+                        <a:rPr lang="de-DE" sz="1200" i="1">
+                          <a:latin typeface="Cambria Math" panose="02040503050406030204" pitchFamily="18" charset="0"/>
+                        </a:rPr>
+                        <m:t>𝑥</m:t>
+                      </m:r>
+                    </m:oMath>
+                  </m:oMathPara>
+                </a14:m>
+                <a:endParaRPr lang="de-DE" sz="1200" dirty="0"/>
+              </a:p>
+            </p:txBody>
+          </p:sp>
+        </mc:Choice>
+        <mc:Fallback>
+          <p:sp>
+            <p:nvSpPr>
+              <p:cNvPr id="11" name="Textfeld 10">
+                <a:extLst>
+                  <a:ext uri="{FF2B5EF4-FFF2-40B4-BE49-F238E27FC236}">
+                    <a16:creationId xmlns:a16="http://schemas.microsoft.com/office/drawing/2014/main" id="{DCD92755-5B4A-762A-7C87-610A5BAD6BD1}"/>
+                  </a:ext>
+                </a:extLst>
+              </p:cNvPr>
+              <p:cNvSpPr txBox="1">
+                <a:spLocks noRot="1" noChangeAspect="1" noMove="1" noResize="1" noEditPoints="1" noAdjustHandles="1" noChangeArrowheads="1" noChangeShapeType="1" noTextEdit="1"/>
+              </p:cNvSpPr>
+              <p:nvPr/>
+            </p:nvSpPr>
+            <p:spPr>
+              <a:xfrm>
+                <a:off x="765892" y="356827"/>
+                <a:ext cx="118494" cy="184666"/>
+              </a:xfrm>
+              <a:prstGeom prst="rect">
+                <a:avLst/>
+              </a:prstGeom>
+              <a:blipFill>
+                <a:blip r:embed="rId5"/>
+                <a:stretch>
+                  <a:fillRect l="-21053" r="-15789"/>
+                </a:stretch>
+              </a:blipFill>
+            </p:spPr>
+            <p:txBody>
+              <a:bodyPr/>
+              <a:lstStyle/>
+              <a:p>
+                <a:r>
+                  <a:rPr lang="de-DE">
+                    <a:noFill/>
+                  </a:rPr>
+                  <a:t> </a:t>
+                </a:r>
+              </a:p>
+            </p:txBody>
+          </p:sp>
+        </mc:Fallback>
+      </mc:AlternateContent>
+      <mc:AlternateContent xmlns:mc="http://schemas.openxmlformats.org/markup-compatibility/2006">
+        <mc:Choice xmlns:a14="http://schemas.microsoft.com/office/drawing/2010/main" Requires="a14">
+          <p:sp>
+            <p:nvSpPr>
+              <p:cNvPr id="14" name="Textfeld 13">
+                <a:extLst>
+                  <a:ext uri="{FF2B5EF4-FFF2-40B4-BE49-F238E27FC236}">
+                    <a16:creationId xmlns:a16="http://schemas.microsoft.com/office/drawing/2014/main" id="{EFE653CB-C22A-B1DA-68FF-657F7CA2780D}"/>
+                  </a:ext>
+                </a:extLst>
+              </p:cNvPr>
+              <p:cNvSpPr txBox="1"/>
+              <p:nvPr/>
+            </p:nvSpPr>
+            <p:spPr>
+              <a:xfrm>
+                <a:off x="1619030" y="1183474"/>
+                <a:ext cx="336182" cy="184666"/>
+              </a:xfrm>
+              <a:prstGeom prst="rect">
+                <a:avLst/>
+              </a:prstGeom>
+              <a:noFill/>
+            </p:spPr>
+            <p:txBody>
+              <a:bodyPr wrap="square" lIns="0" tIns="0" rIns="0" bIns="0" rtlCol="0">
+                <a:spAutoFit/>
+              </a:bodyPr>
+              <a:lstStyle/>
+              <a:p>
+                <a:pPr/>
+                <a14:m>
+                  <m:oMathPara xmlns:m="http://schemas.openxmlformats.org/officeDocument/2006/math">
+                    <m:oMathParaPr>
+                      <m:jc m:val="centerGroup"/>
+                    </m:oMathParaPr>
+                    <m:oMath xmlns:m="http://schemas.openxmlformats.org/officeDocument/2006/math">
+                      <m:r>
+                        <a:rPr lang="de-DE" sz="1200" i="1">
+                          <a:latin typeface="Cambria Math" panose="02040503050406030204" pitchFamily="18" charset="0"/>
+                        </a:rPr>
+                        <m:t>𝑓</m:t>
+                      </m:r>
+                      <m:r>
+                        <a:rPr lang="de-DE" sz="1200" i="1">
+                          <a:latin typeface="Cambria Math" panose="02040503050406030204" pitchFamily="18" charset="0"/>
+                        </a:rPr>
+                        <m:t>(</m:t>
+                      </m:r>
+                      <m:r>
+                        <a:rPr lang="de-DE" sz="1200" i="1">
+                          <a:latin typeface="Cambria Math" panose="02040503050406030204" pitchFamily="18" charset="0"/>
+                        </a:rPr>
+                        <m:t>𝑥</m:t>
+                      </m:r>
+                      <m:r>
+                        <a:rPr lang="de-DE" sz="1200" i="1">
+                          <a:latin typeface="Cambria Math" panose="02040503050406030204" pitchFamily="18" charset="0"/>
+                        </a:rPr>
+                        <m:t>)</m:t>
+                      </m:r>
+                    </m:oMath>
+                  </m:oMathPara>
+                </a14:m>
+                <a:endParaRPr lang="de-DE" sz="1200" dirty="0"/>
+              </a:p>
+            </p:txBody>
+          </p:sp>
+        </mc:Choice>
+        <mc:Fallback>
+          <p:sp>
+            <p:nvSpPr>
+              <p:cNvPr id="14" name="Textfeld 13">
+                <a:extLst>
+                  <a:ext uri="{FF2B5EF4-FFF2-40B4-BE49-F238E27FC236}">
+                    <a16:creationId xmlns:a16="http://schemas.microsoft.com/office/drawing/2014/main" id="{EFE653CB-C22A-B1DA-68FF-657F7CA2780D}"/>
+                  </a:ext>
+                </a:extLst>
+              </p:cNvPr>
+              <p:cNvSpPr txBox="1">
+                <a:spLocks noRot="1" noChangeAspect="1" noMove="1" noResize="1" noEditPoints="1" noAdjustHandles="1" noChangeArrowheads="1" noChangeShapeType="1" noTextEdit="1"/>
+              </p:cNvSpPr>
+              <p:nvPr/>
+            </p:nvSpPr>
+            <p:spPr>
+              <a:xfrm>
+                <a:off x="1619030" y="1183474"/>
+                <a:ext cx="336182" cy="184666"/>
+              </a:xfrm>
+              <a:prstGeom prst="rect">
+                <a:avLst/>
+              </a:prstGeom>
+              <a:blipFill>
+                <a:blip r:embed="rId6"/>
+                <a:stretch>
+                  <a:fillRect l="-16364" t="-3333" r="-16364" b="-40000"/>
+                </a:stretch>
+              </a:blipFill>
+            </p:spPr>
+            <p:txBody>
+              <a:bodyPr/>
+              <a:lstStyle/>
+              <a:p>
+                <a:r>
+                  <a:rPr lang="de-DE">
+                    <a:noFill/>
+                  </a:rPr>
+                  <a:t> </a:t>
+                </a:r>
+              </a:p>
+            </p:txBody>
+          </p:sp>
+        </mc:Fallback>
+      </mc:AlternateContent>
+      <mc:AlternateContent xmlns:mc="http://schemas.openxmlformats.org/markup-compatibility/2006">
+        <mc:Choice xmlns:a14="http://schemas.microsoft.com/office/drawing/2010/main" Requires="a14">
+          <p:sp>
+            <p:nvSpPr>
+              <p:cNvPr id="16" name="Textfeld 15">
+                <a:extLst>
+                  <a:ext uri="{FF2B5EF4-FFF2-40B4-BE49-F238E27FC236}">
+                    <a16:creationId xmlns:a16="http://schemas.microsoft.com/office/drawing/2014/main" id="{BAF70709-778A-DC40-DCD5-E79D9C178EEB}"/>
+                  </a:ext>
+                </a:extLst>
+              </p:cNvPr>
+              <p:cNvSpPr txBox="1"/>
+              <p:nvPr/>
+            </p:nvSpPr>
+            <p:spPr>
+              <a:xfrm>
+                <a:off x="398332" y="821498"/>
+                <a:ext cx="1116189" cy="261610"/>
+              </a:xfrm>
+              <a:prstGeom prst="rect">
+                <a:avLst/>
+              </a:prstGeom>
+              <a:noFill/>
+            </p:spPr>
+            <p:txBody>
+              <a:bodyPr wrap="square">
+                <a:spAutoFit/>
+              </a:bodyPr>
+              <a:lstStyle/>
+              <a:p>
+                <a:pPr/>
+                <a14:m>
+                  <m:oMathPara xmlns:m="http://schemas.openxmlformats.org/officeDocument/2006/math">
+                    <m:oMathParaPr>
+                      <m:jc m:val="centerGroup"/>
+                    </m:oMathParaPr>
+                    <m:oMath xmlns:m="http://schemas.openxmlformats.org/officeDocument/2006/math">
+                      <m:r>
+                        <a:rPr lang="de-DE" sz="1100" i="1">
+                          <a:latin typeface="Cambria Math" panose="02040503050406030204" pitchFamily="18" charset="0"/>
+                        </a:rPr>
+                        <m:t>𝑓</m:t>
+                      </m:r>
+                      <m:r>
+                        <a:rPr lang="de-DE" sz="1100" i="1">
+                          <a:latin typeface="Cambria Math" panose="02040503050406030204" pitchFamily="18" charset="0"/>
+                        </a:rPr>
+                        <m:t>:</m:t>
+                      </m:r>
+                      <m:r>
+                        <a:rPr lang="de-DE" sz="1100" i="1">
+                          <a:latin typeface="Cambria Math" panose="02040503050406030204" pitchFamily="18" charset="0"/>
+                        </a:rPr>
+                        <m:t>𝐷</m:t>
+                      </m:r>
+                      <m:r>
+                        <a:rPr lang="de-DE" sz="1100" i="1">
+                          <a:latin typeface="Cambria Math" panose="02040503050406030204" pitchFamily="18" charset="0"/>
+                        </a:rPr>
+                        <m:t>→</m:t>
+                      </m:r>
+                      <m:r>
+                        <a:rPr lang="de-DE" sz="1100" i="1">
+                          <a:latin typeface="Cambria Math" panose="02040503050406030204" pitchFamily="18" charset="0"/>
+                        </a:rPr>
+                        <m:t>𝑍</m:t>
+                      </m:r>
+                    </m:oMath>
+                  </m:oMathPara>
+                </a14:m>
+                <a:endParaRPr lang="de-DE" sz="1100" dirty="0"/>
+              </a:p>
+            </p:txBody>
+          </p:sp>
+        </mc:Choice>
+        <mc:Fallback>
+          <p:sp>
+            <p:nvSpPr>
+              <p:cNvPr id="16" name="Textfeld 15">
+                <a:extLst>
+                  <a:ext uri="{FF2B5EF4-FFF2-40B4-BE49-F238E27FC236}">
+                    <a16:creationId xmlns:a16="http://schemas.microsoft.com/office/drawing/2014/main" id="{BAF70709-778A-DC40-DCD5-E79D9C178EEB}"/>
+                  </a:ext>
+                </a:extLst>
+              </p:cNvPr>
+              <p:cNvSpPr txBox="1">
+                <a:spLocks noRot="1" noChangeAspect="1" noMove="1" noResize="1" noEditPoints="1" noAdjustHandles="1" noChangeArrowheads="1" noChangeShapeType="1" noTextEdit="1"/>
+              </p:cNvSpPr>
+              <p:nvPr/>
+            </p:nvSpPr>
+            <p:spPr>
+              <a:xfrm>
+                <a:off x="398332" y="821498"/>
+                <a:ext cx="1116189" cy="261610"/>
+              </a:xfrm>
+              <a:prstGeom prst="rect">
+                <a:avLst/>
+              </a:prstGeom>
+              <a:blipFill>
+                <a:blip r:embed="rId7"/>
+                <a:stretch>
+                  <a:fillRect b="-2326"/>
+                </a:stretch>
+              </a:blipFill>
+            </p:spPr>
+            <p:txBody>
+              <a:bodyPr/>
+              <a:lstStyle/>
+              <a:p>
+                <a:r>
+                  <a:rPr lang="de-DE">
+                    <a:noFill/>
+                  </a:rPr>
+                  <a:t> </a:t>
+                </a:r>
+              </a:p>
+            </p:txBody>
+          </p:sp>
+        </mc:Fallback>
+      </mc:AlternateContent>
+      <p:cxnSp>
+        <p:nvCxnSpPr>
+          <p:cNvPr id="17" name="Gerade Verbindung mit Pfeil 16">
+            <a:extLst>
+              <a:ext uri="{FF2B5EF4-FFF2-40B4-BE49-F238E27FC236}">
+                <a16:creationId xmlns:a16="http://schemas.microsoft.com/office/drawing/2014/main" id="{859D7809-7CDA-7F39-C047-B65A1628F42C}"/>
+              </a:ext>
+            </a:extLst>
+          </p:cNvPr>
+          <p:cNvCxnSpPr>
+            <a:cxnSpLocks/>
+          </p:cNvCxnSpPr>
+          <p:nvPr/>
+        </p:nvCxnSpPr>
+        <p:spPr>
+          <a:xfrm>
+            <a:off x="1901590" y="1399839"/>
+            <a:ext cx="673597" cy="591179"/>
+          </a:xfrm>
+          <a:prstGeom prst="straightConnector1">
+            <a:avLst/>
+          </a:prstGeom>
+          <a:ln w="3175">
+            <a:solidFill>
+              <a:schemeClr val="tx1"/>
+            </a:solidFill>
+            <a:tailEnd type="triangle"/>
+          </a:ln>
+        </p:spPr>
+        <p:style>
+          <a:lnRef idx="2">
+            <a:schemeClr val="accent1"/>
+          </a:lnRef>
+          <a:fillRef idx="0">
+            <a:schemeClr val="accent1"/>
+          </a:fillRef>
+          <a:effectRef idx="1">
+            <a:schemeClr val="accent1"/>
+          </a:effectRef>
+          <a:fontRef idx="minor">
+            <a:schemeClr val="tx1"/>
+          </a:fontRef>
+        </p:style>
+      </p:cxnSp>
+      <mc:AlternateContent xmlns:mc="http://schemas.openxmlformats.org/markup-compatibility/2006">
+        <mc:Choice xmlns:a14="http://schemas.microsoft.com/office/drawing/2010/main" Requires="a14">
+          <p:sp>
+            <p:nvSpPr>
+              <p:cNvPr id="18" name="Textfeld 17">
+                <a:extLst>
+                  <a:ext uri="{FF2B5EF4-FFF2-40B4-BE49-F238E27FC236}">
+                    <a16:creationId xmlns:a16="http://schemas.microsoft.com/office/drawing/2014/main" id="{35EB5BFC-D021-B7F6-887D-B53E3909A8F3}"/>
+                  </a:ext>
+                </a:extLst>
+              </p:cNvPr>
+              <p:cNvSpPr txBox="1"/>
+              <p:nvPr/>
+            </p:nvSpPr>
+            <p:spPr>
+              <a:xfrm>
+                <a:off x="1343495" y="1673270"/>
+                <a:ext cx="1116189" cy="261610"/>
+              </a:xfrm>
+              <a:prstGeom prst="rect">
+                <a:avLst/>
+              </a:prstGeom>
+              <a:noFill/>
+            </p:spPr>
+            <p:txBody>
+              <a:bodyPr wrap="square">
+                <a:spAutoFit/>
+              </a:bodyPr>
+              <a:lstStyle/>
+              <a:p>
+                <a:pPr/>
+                <a14:m>
+                  <m:oMathPara xmlns:m="http://schemas.openxmlformats.org/officeDocument/2006/math">
+                    <m:oMathParaPr>
+                      <m:jc m:val="centerGroup"/>
+                    </m:oMathParaPr>
+                    <m:oMath xmlns:m="http://schemas.openxmlformats.org/officeDocument/2006/math">
+                      <m:r>
+                        <a:rPr lang="de-DE" sz="1100" i="1">
+                          <a:latin typeface="Cambria Math" panose="02040503050406030204" pitchFamily="18" charset="0"/>
+                        </a:rPr>
+                        <m:t>𝑔</m:t>
+                      </m:r>
+                      <m:r>
+                        <a:rPr lang="de-DE" sz="1100" i="1">
+                          <a:latin typeface="Cambria Math" panose="02040503050406030204" pitchFamily="18" charset="0"/>
+                        </a:rPr>
+                        <m:t>:</m:t>
+                      </m:r>
+                      <m:r>
+                        <a:rPr lang="de-DE" sz="1100" i="1">
+                          <a:latin typeface="Cambria Math" panose="02040503050406030204" pitchFamily="18" charset="0"/>
+                        </a:rPr>
+                        <m:t>𝑍</m:t>
+                      </m:r>
+                      <m:r>
+                        <a:rPr lang="de-DE" sz="1100" i="1">
+                          <a:latin typeface="Cambria Math" panose="02040503050406030204" pitchFamily="18" charset="0"/>
+                        </a:rPr>
+                        <m:t>→</m:t>
+                      </m:r>
+                      <m:r>
+                        <a:rPr lang="de-DE" sz="1100" i="1">
+                          <a:latin typeface="Cambria Math" panose="02040503050406030204" pitchFamily="18" charset="0"/>
+                        </a:rPr>
+                        <m:t>𝑆</m:t>
+                      </m:r>
+                    </m:oMath>
+                  </m:oMathPara>
+                </a14:m>
+                <a:endParaRPr lang="de-DE" sz="1100" dirty="0"/>
+              </a:p>
+            </p:txBody>
+          </p:sp>
+        </mc:Choice>
+        <mc:Fallback>
+          <p:sp>
+            <p:nvSpPr>
+              <p:cNvPr id="18" name="Textfeld 17">
+                <a:extLst>
+                  <a:ext uri="{FF2B5EF4-FFF2-40B4-BE49-F238E27FC236}">
+                    <a16:creationId xmlns:a16="http://schemas.microsoft.com/office/drawing/2014/main" id="{35EB5BFC-D021-B7F6-887D-B53E3909A8F3}"/>
+                  </a:ext>
+                </a:extLst>
+              </p:cNvPr>
+              <p:cNvSpPr txBox="1">
+                <a:spLocks noRot="1" noChangeAspect="1" noMove="1" noResize="1" noEditPoints="1" noAdjustHandles="1" noChangeArrowheads="1" noChangeShapeType="1" noTextEdit="1"/>
+              </p:cNvSpPr>
+              <p:nvPr/>
+            </p:nvSpPr>
+            <p:spPr>
+              <a:xfrm>
+                <a:off x="1343495" y="1673270"/>
+                <a:ext cx="1116189" cy="261610"/>
+              </a:xfrm>
+              <a:prstGeom prst="rect">
+                <a:avLst/>
+              </a:prstGeom>
+              <a:blipFill>
+                <a:blip r:embed="rId8"/>
+                <a:stretch>
+                  <a:fillRect/>
+                </a:stretch>
+              </a:blipFill>
+            </p:spPr>
+            <p:txBody>
+              <a:bodyPr/>
+              <a:lstStyle/>
+              <a:p>
+                <a:r>
+                  <a:rPr lang="de-DE">
+                    <a:noFill/>
+                  </a:rPr>
+                  <a:t> </a:t>
+                </a:r>
+              </a:p>
+            </p:txBody>
+          </p:sp>
+        </mc:Fallback>
+      </mc:AlternateContent>
+      <mc:AlternateContent xmlns:mc="http://schemas.openxmlformats.org/markup-compatibility/2006">
+        <mc:Choice xmlns:a14="http://schemas.microsoft.com/office/drawing/2010/main" Requires="a14">
+          <p:sp>
+            <p:nvSpPr>
+              <p:cNvPr id="19" name="Textfeld 18">
+                <a:extLst>
+                  <a:ext uri="{FF2B5EF4-FFF2-40B4-BE49-F238E27FC236}">
+                    <a16:creationId xmlns:a16="http://schemas.microsoft.com/office/drawing/2014/main" id="{B7AFC01D-F26F-C653-0C82-DD8D900BCFD7}"/>
+                  </a:ext>
+                </a:extLst>
+              </p:cNvPr>
+              <p:cNvSpPr txBox="1"/>
+              <p:nvPr/>
+            </p:nvSpPr>
+            <p:spPr>
+              <a:xfrm>
+                <a:off x="2515389" y="2001572"/>
+                <a:ext cx="561116" cy="208455"/>
+              </a:xfrm>
+              <a:prstGeom prst="rect">
+                <a:avLst/>
+              </a:prstGeom>
+              <a:noFill/>
+            </p:spPr>
+            <p:txBody>
+              <a:bodyPr wrap="square" lIns="0" tIns="0" rIns="0" bIns="0" rtlCol="0">
+                <a:spAutoFit/>
+              </a:bodyPr>
+              <a:lstStyle/>
+              <a:p>
+                <a:pPr/>
+                <a14:m>
+                  <m:oMathPara xmlns:m="http://schemas.openxmlformats.org/officeDocument/2006/math">
+                    <m:oMathParaPr>
+                      <m:jc m:val="centerGroup"/>
+                    </m:oMathParaPr>
+                    <m:oMath xmlns:m="http://schemas.openxmlformats.org/officeDocument/2006/math">
+                      <m:r>
+                        <a:rPr lang="de-DE" sz="1200" i="1" smtClean="0">
+                          <a:latin typeface="Cambria Math" panose="02040503050406030204" pitchFamily="18" charset="0"/>
+                        </a:rPr>
+                        <m:t>𝑔</m:t>
+                      </m:r>
+                      <m:d>
+                        <m:dPr>
+                          <m:ctrlPr>
                             <a:rPr lang="de-DE" sz="1200" i="1">
                               <a:latin typeface="Cambria Math" panose="02040503050406030204" pitchFamily="18" charset="0"/>
                             </a:rPr>
-                            <m:t>𝑥</m:t>
-                          </m:r>
-                        </m:oMath>
-                      </m:oMathPara>
-                    </a14:m>
-                    <a:endParaRPr lang="de-DE" sz="1200" dirty="0"/>
-                  </a:p>
-                </p:txBody>
-              </p:sp>
-            </mc:Choice>
-            <mc:Fallback xmlns="">
-              <p:sp>
-                <p:nvSpPr>
-                  <p:cNvPr id="11" name="Textfeld 10">
-                    <a:extLst>
-                      <a:ext uri="{FF2B5EF4-FFF2-40B4-BE49-F238E27FC236}">
-                        <a16:creationId xmlns:a16="http://schemas.microsoft.com/office/drawing/2014/main" id="{DCD92755-5B4A-762A-7C87-610A5BAD6BD1}"/>
-                      </a:ext>
-                    </a:extLst>
-                  </p:cNvPr>
-                  <p:cNvSpPr txBox="1">
-                    <a:spLocks noRot="1" noChangeAspect="1" noMove="1" noResize="1" noEditPoints="1" noAdjustHandles="1" noChangeArrowheads="1" noChangeShapeType="1" noTextEdit="1"/>
-                  </p:cNvSpPr>
-                  <p:nvPr/>
-                </p:nvSpPr>
-                <p:spPr>
-                  <a:xfrm>
-                    <a:off x="701820" y="1092466"/>
-                    <a:ext cx="118494" cy="184666"/>
-                  </a:xfrm>
-                  <a:prstGeom prst="rect">
-                    <a:avLst/>
-                  </a:prstGeom>
-                  <a:blipFill>
-                    <a:blip r:embed="rId16"/>
-                    <a:stretch>
-                      <a:fillRect l="-15789" r="-15789"/>
-                    </a:stretch>
-                  </a:blipFill>
-                </p:spPr>
-                <p:txBody>
-                  <a:bodyPr/>
-                  <a:lstStyle/>
-                  <a:p>
-                    <a:r>
-                      <a:rPr lang="de-DE">
-                        <a:noFill/>
-                      </a:rPr>
-                      <a:t> </a:t>
-                    </a:r>
-                  </a:p>
-                </p:txBody>
-              </p:sp>
-            </mc:Fallback>
-          </mc:AlternateContent>
-          <mc:AlternateContent xmlns:mc="http://schemas.openxmlformats.org/markup-compatibility/2006" xmlns:a14="http://schemas.microsoft.com/office/drawing/2010/main">
-            <mc:Choice Requires="a14">
-              <p:sp>
-                <p:nvSpPr>
-                  <p:cNvPr id="14" name="Textfeld 13">
-                    <a:extLst>
-                      <a:ext uri="{FF2B5EF4-FFF2-40B4-BE49-F238E27FC236}">
-                        <a16:creationId xmlns:a16="http://schemas.microsoft.com/office/drawing/2014/main" id="{EFE653CB-C22A-B1DA-68FF-657F7CA2780D}"/>
-                      </a:ext>
-                    </a:extLst>
-                  </p:cNvPr>
-                  <p:cNvSpPr txBox="1"/>
-                  <p:nvPr/>
-                </p:nvSpPr>
-                <p:spPr>
-                  <a:xfrm>
-                    <a:off x="1554958" y="1919113"/>
-                    <a:ext cx="336182" cy="184666"/>
-                  </a:xfrm>
-                  <a:prstGeom prst="rect">
-                    <a:avLst/>
-                  </a:prstGeom>
-                  <a:noFill/>
-                </p:spPr>
-                <p:txBody>
-                  <a:bodyPr wrap="square" lIns="0" tIns="0" rIns="0" bIns="0" rtlCol="0">
-                    <a:spAutoFit/>
-                  </a:bodyPr>
-                  <a:lstStyle/>
-                  <a:p>
-                    <a:pPr/>
-                    <a14:m>
-                      <m:oMathPara xmlns:m="http://schemas.openxmlformats.org/officeDocument/2006/math">
-                        <m:oMathParaPr>
-                          <m:jc m:val="centerGroup"/>
-                        </m:oMathParaPr>
-                        <m:oMath xmlns:m="http://schemas.openxmlformats.org/officeDocument/2006/math">
+                          </m:ctrlPr>
+                        </m:dPr>
+                        <m:e>
                           <m:r>
                             <a:rPr lang="de-DE" sz="1200" i="1">
                               <a:latin typeface="Cambria Math" panose="02040503050406030204" pitchFamily="18" charset="0"/>
                             </a:rPr>
                             <m:t>𝑓</m:t>
-                          </m:r>
-                          <m:r>
-                            <a:rPr lang="de-DE" sz="1200" i="1">
-                              <a:latin typeface="Cambria Math" panose="02040503050406030204" pitchFamily="18" charset="0"/>
-                            </a:rPr>
-                            <m:t>(</m:t>
-                          </m:r>
-                          <m:r>
-                            <a:rPr lang="de-DE" sz="1200" i="1">
-                              <a:latin typeface="Cambria Math" panose="02040503050406030204" pitchFamily="18" charset="0"/>
-                            </a:rPr>
-                            <m:t>𝑥</m:t>
-                          </m:r>
-                          <m:r>
-                            <a:rPr lang="de-DE" sz="1200" i="1">
-                              <a:latin typeface="Cambria Math" panose="02040503050406030204" pitchFamily="18" charset="0"/>
-                            </a:rPr>
-                            <m:t>)</m:t>
-                          </m:r>
-                        </m:oMath>
-                      </m:oMathPara>
-                    </a14:m>
-                    <a:endParaRPr lang="de-DE" sz="1200" dirty="0"/>
-                  </a:p>
-                </p:txBody>
-              </p:sp>
-            </mc:Choice>
-            <mc:Fallback xmlns="">
-              <p:sp>
-                <p:nvSpPr>
-                  <p:cNvPr id="14" name="Textfeld 13">
-                    <a:extLst>
-                      <a:ext uri="{FF2B5EF4-FFF2-40B4-BE49-F238E27FC236}">
-                        <a16:creationId xmlns:a16="http://schemas.microsoft.com/office/drawing/2014/main" id="{EFE653CB-C22A-B1DA-68FF-657F7CA2780D}"/>
-                      </a:ext>
-                    </a:extLst>
-                  </p:cNvPr>
-                  <p:cNvSpPr txBox="1">
-                    <a:spLocks noRot="1" noChangeAspect="1" noMove="1" noResize="1" noEditPoints="1" noAdjustHandles="1" noChangeArrowheads="1" noChangeShapeType="1" noTextEdit="1"/>
-                  </p:cNvSpPr>
-                  <p:nvPr/>
-                </p:nvSpPr>
-                <p:spPr>
-                  <a:xfrm>
-                    <a:off x="1554958" y="1919113"/>
-                    <a:ext cx="336182" cy="184666"/>
-                  </a:xfrm>
-                  <a:prstGeom prst="rect">
-                    <a:avLst/>
-                  </a:prstGeom>
-                  <a:blipFill>
-                    <a:blip r:embed="rId17"/>
-                    <a:stretch>
-                      <a:fillRect l="-16364" t="-3226" r="-16364" b="-35484"/>
-                    </a:stretch>
-                  </a:blipFill>
-                </p:spPr>
-                <p:txBody>
-                  <a:bodyPr/>
-                  <a:lstStyle/>
-                  <a:p>
-                    <a:r>
-                      <a:rPr lang="de-DE">
-                        <a:noFill/>
-                      </a:rPr>
-                      <a:t> </a:t>
-                    </a:r>
-                  </a:p>
-                </p:txBody>
-              </p:sp>
-            </mc:Fallback>
-          </mc:AlternateContent>
-          <mc:AlternateContent xmlns:mc="http://schemas.openxmlformats.org/markup-compatibility/2006" xmlns:a14="http://schemas.microsoft.com/office/drawing/2010/main">
-            <mc:Choice Requires="a14">
-              <p:sp>
-                <p:nvSpPr>
-                  <p:cNvPr id="16" name="Textfeld 15">
-                    <a:extLst>
-                      <a:ext uri="{FF2B5EF4-FFF2-40B4-BE49-F238E27FC236}">
-                        <a16:creationId xmlns:a16="http://schemas.microsoft.com/office/drawing/2014/main" id="{BAF70709-778A-DC40-DCD5-E79D9C178EEB}"/>
-                      </a:ext>
-                    </a:extLst>
-                  </p:cNvPr>
-                  <p:cNvSpPr txBox="1"/>
-                  <p:nvPr/>
-                </p:nvSpPr>
-                <p:spPr>
-                  <a:xfrm>
-                    <a:off x="334260" y="1557137"/>
-                    <a:ext cx="1116189" cy="261610"/>
-                  </a:xfrm>
-                  <a:prstGeom prst="rect">
-                    <a:avLst/>
-                  </a:prstGeom>
-                  <a:noFill/>
-                </p:spPr>
-                <p:txBody>
-                  <a:bodyPr wrap="square">
-                    <a:spAutoFit/>
-                  </a:bodyPr>
-                  <a:lstStyle/>
-                  <a:p>
-                    <a:pPr/>
-                    <a14:m>
-                      <m:oMathPara xmlns:m="http://schemas.openxmlformats.org/officeDocument/2006/math">
-                        <m:oMathParaPr>
-                          <m:jc m:val="centerGroup"/>
-                        </m:oMathParaPr>
-                        <m:oMath xmlns:m="http://schemas.openxmlformats.org/officeDocument/2006/math">
-                          <m:r>
-                            <a:rPr lang="de-DE" sz="1100" i="1">
-                              <a:latin typeface="Cambria Math" panose="02040503050406030204" pitchFamily="18" charset="0"/>
-                            </a:rPr>
-                            <m:t>𝑓</m:t>
-                          </m:r>
-                          <m:r>
-                            <a:rPr lang="de-DE" sz="1100" i="1">
-                              <a:latin typeface="Cambria Math" panose="02040503050406030204" pitchFamily="18" charset="0"/>
-                            </a:rPr>
-                            <m:t>:</m:t>
-                          </m:r>
-                          <m:r>
-                            <a:rPr lang="de-DE" sz="1100" i="1">
-                              <a:latin typeface="Cambria Math" panose="02040503050406030204" pitchFamily="18" charset="0"/>
-                            </a:rPr>
-                            <m:t>𝐷</m:t>
-                          </m:r>
-                          <m:r>
-                            <a:rPr lang="de-DE" sz="1100" i="1">
-                              <a:latin typeface="Cambria Math" panose="02040503050406030204" pitchFamily="18" charset="0"/>
-                            </a:rPr>
-                            <m:t>→</m:t>
-                          </m:r>
-                          <m:r>
-                            <a:rPr lang="de-DE" sz="1100" i="1">
-                              <a:latin typeface="Cambria Math" panose="02040503050406030204" pitchFamily="18" charset="0"/>
-                            </a:rPr>
-                            <m:t>𝑍</m:t>
-                          </m:r>
-                        </m:oMath>
-                      </m:oMathPara>
-                    </a14:m>
-                    <a:endParaRPr lang="de-DE" sz="1100" dirty="0"/>
-                  </a:p>
-                </p:txBody>
-              </p:sp>
-            </mc:Choice>
-            <mc:Fallback xmlns="">
-              <p:sp>
-                <p:nvSpPr>
-                  <p:cNvPr id="16" name="Textfeld 15">
-                    <a:extLst>
-                      <a:ext uri="{FF2B5EF4-FFF2-40B4-BE49-F238E27FC236}">
-                        <a16:creationId xmlns:a16="http://schemas.microsoft.com/office/drawing/2014/main" id="{BAF70709-778A-DC40-DCD5-E79D9C178EEB}"/>
-                      </a:ext>
-                    </a:extLst>
-                  </p:cNvPr>
-                  <p:cNvSpPr txBox="1">
-                    <a:spLocks noRot="1" noChangeAspect="1" noMove="1" noResize="1" noEditPoints="1" noAdjustHandles="1" noChangeArrowheads="1" noChangeShapeType="1" noTextEdit="1"/>
-                  </p:cNvSpPr>
-                  <p:nvPr/>
-                </p:nvSpPr>
-                <p:spPr>
-                  <a:xfrm>
-                    <a:off x="334260" y="1557137"/>
-                    <a:ext cx="1116189" cy="261610"/>
-                  </a:xfrm>
-                  <a:prstGeom prst="rect">
-                    <a:avLst/>
-                  </a:prstGeom>
-                  <a:blipFill>
-                    <a:blip r:embed="rId18"/>
-                    <a:stretch>
-                      <a:fillRect b="-2326"/>
-                    </a:stretch>
-                  </a:blipFill>
-                </p:spPr>
-                <p:txBody>
-                  <a:bodyPr/>
-                  <a:lstStyle/>
-                  <a:p>
-                    <a:r>
-                      <a:rPr lang="de-DE">
-                        <a:noFill/>
-                      </a:rPr>
-                      <a:t> </a:t>
-                    </a:r>
-                  </a:p>
-                </p:txBody>
-              </p:sp>
-            </mc:Fallback>
-          </mc:AlternateContent>
-          <p:cxnSp>
-            <p:nvCxnSpPr>
-              <p:cNvPr id="17" name="Gerade Verbindung mit Pfeil 16">
-                <a:extLst>
-                  <a:ext uri="{FF2B5EF4-FFF2-40B4-BE49-F238E27FC236}">
-                    <a16:creationId xmlns:a16="http://schemas.microsoft.com/office/drawing/2014/main" id="{859D7809-7CDA-7F39-C047-B65A1628F42C}"/>
-                  </a:ext>
-                </a:extLst>
-              </p:cNvPr>
-              <p:cNvCxnSpPr>
-                <a:cxnSpLocks/>
-              </p:cNvCxnSpPr>
-              <p:nvPr/>
-            </p:nvCxnSpPr>
-            <p:spPr>
-              <a:xfrm>
-                <a:off x="1837518" y="2135478"/>
-                <a:ext cx="673597" cy="591179"/>
-              </a:xfrm>
-              <a:prstGeom prst="straightConnector1">
-                <a:avLst/>
-              </a:prstGeom>
-              <a:ln w="3175">
-                <a:solidFill>
-                  <a:schemeClr val="tx1"/>
-                </a:solidFill>
-                <a:tailEnd type="triangle"/>
-              </a:ln>
-            </p:spPr>
-            <p:style>
-              <a:lnRef idx="2">
-                <a:schemeClr val="accent1"/>
-              </a:lnRef>
-              <a:fillRef idx="0">
-                <a:schemeClr val="accent1"/>
-              </a:fillRef>
-              <a:effectRef idx="1">
-                <a:schemeClr val="accent1"/>
-              </a:effectRef>
-              <a:fontRef idx="minor">
-                <a:schemeClr val="tx1"/>
-              </a:fontRef>
-            </p:style>
-          </p:cxnSp>
-          <mc:AlternateContent xmlns:mc="http://schemas.openxmlformats.org/markup-compatibility/2006" xmlns:a14="http://schemas.microsoft.com/office/drawing/2010/main">
-            <mc:Choice Requires="a14">
-              <p:sp>
-                <p:nvSpPr>
-                  <p:cNvPr id="18" name="Textfeld 17">
-                    <a:extLst>
-                      <a:ext uri="{FF2B5EF4-FFF2-40B4-BE49-F238E27FC236}">
-                        <a16:creationId xmlns:a16="http://schemas.microsoft.com/office/drawing/2014/main" id="{35EB5BFC-D021-B7F6-887D-B53E3909A8F3}"/>
-                      </a:ext>
-                    </a:extLst>
-                  </p:cNvPr>
-                  <p:cNvSpPr txBox="1"/>
-                  <p:nvPr/>
-                </p:nvSpPr>
-                <p:spPr>
-                  <a:xfrm>
-                    <a:off x="1279423" y="2408909"/>
-                    <a:ext cx="1116189" cy="261610"/>
-                  </a:xfrm>
-                  <a:prstGeom prst="rect">
-                    <a:avLst/>
-                  </a:prstGeom>
-                  <a:noFill/>
-                </p:spPr>
-                <p:txBody>
-                  <a:bodyPr wrap="square">
-                    <a:spAutoFit/>
-                  </a:bodyPr>
-                  <a:lstStyle/>
-                  <a:p>
-                    <a:pPr/>
-                    <a14:m>
-                      <m:oMathPara xmlns:m="http://schemas.openxmlformats.org/officeDocument/2006/math">
-                        <m:oMathParaPr>
-                          <m:jc m:val="centerGroup"/>
-                        </m:oMathParaPr>
-                        <m:oMath xmlns:m="http://schemas.openxmlformats.org/officeDocument/2006/math">
-                          <m:r>
-                            <a:rPr lang="de-DE" sz="1100" i="1">
-                              <a:latin typeface="Cambria Math" panose="02040503050406030204" pitchFamily="18" charset="0"/>
-                            </a:rPr>
-                            <m:t>𝑔</m:t>
-                          </m:r>
-                          <m:r>
-                            <a:rPr lang="de-DE" sz="1100" i="1">
-                              <a:latin typeface="Cambria Math" panose="02040503050406030204" pitchFamily="18" charset="0"/>
-                            </a:rPr>
-                            <m:t>:</m:t>
-                          </m:r>
-                          <m:r>
-                            <a:rPr lang="de-DE" sz="1100" i="1">
-                              <a:latin typeface="Cambria Math" panose="02040503050406030204" pitchFamily="18" charset="0"/>
-                            </a:rPr>
-                            <m:t>𝑍</m:t>
-                          </m:r>
-                          <m:r>
-                            <a:rPr lang="de-DE" sz="1100" i="1">
-                              <a:latin typeface="Cambria Math" panose="02040503050406030204" pitchFamily="18" charset="0"/>
-                            </a:rPr>
-                            <m:t>→</m:t>
-                          </m:r>
-                          <m:r>
-                            <a:rPr lang="de-DE" sz="1100" i="1">
-                              <a:latin typeface="Cambria Math" panose="02040503050406030204" pitchFamily="18" charset="0"/>
-                            </a:rPr>
-                            <m:t>𝑆</m:t>
-                          </m:r>
-                        </m:oMath>
-                      </m:oMathPara>
-                    </a14:m>
-                    <a:endParaRPr lang="de-DE" sz="1100" dirty="0"/>
-                  </a:p>
-                </p:txBody>
-              </p:sp>
-            </mc:Choice>
-            <mc:Fallback xmlns="">
-              <p:sp>
-                <p:nvSpPr>
-                  <p:cNvPr id="18" name="Textfeld 17">
-                    <a:extLst>
-                      <a:ext uri="{FF2B5EF4-FFF2-40B4-BE49-F238E27FC236}">
-                        <a16:creationId xmlns:a16="http://schemas.microsoft.com/office/drawing/2014/main" id="{35EB5BFC-D021-B7F6-887D-B53E3909A8F3}"/>
-                      </a:ext>
-                    </a:extLst>
-                  </p:cNvPr>
-                  <p:cNvSpPr txBox="1">
-                    <a:spLocks noRot="1" noChangeAspect="1" noMove="1" noResize="1" noEditPoints="1" noAdjustHandles="1" noChangeArrowheads="1" noChangeShapeType="1" noTextEdit="1"/>
-                  </p:cNvSpPr>
-                  <p:nvPr/>
-                </p:nvSpPr>
-                <p:spPr>
-                  <a:xfrm>
-                    <a:off x="1279423" y="2408909"/>
-                    <a:ext cx="1116189" cy="261610"/>
-                  </a:xfrm>
-                  <a:prstGeom prst="rect">
-                    <a:avLst/>
-                  </a:prstGeom>
-                  <a:blipFill>
-                    <a:blip r:embed="rId19"/>
-                    <a:stretch>
-                      <a:fillRect/>
-                    </a:stretch>
-                  </a:blipFill>
-                </p:spPr>
-                <p:txBody>
-                  <a:bodyPr/>
-                  <a:lstStyle/>
-                  <a:p>
-                    <a:r>
-                      <a:rPr lang="de-DE">
-                        <a:noFill/>
-                      </a:rPr>
-                      <a:t> </a:t>
-                    </a:r>
-                  </a:p>
-                </p:txBody>
-              </p:sp>
-            </mc:Fallback>
-          </mc:AlternateContent>
-          <mc:AlternateContent xmlns:mc="http://schemas.openxmlformats.org/markup-compatibility/2006">
-            <mc:Choice xmlns:a14="http://schemas.microsoft.com/office/drawing/2010/main" Requires="a14">
-              <p:sp>
-                <p:nvSpPr>
-                  <p:cNvPr id="19" name="Textfeld 18">
-                    <a:extLst>
-                      <a:ext uri="{FF2B5EF4-FFF2-40B4-BE49-F238E27FC236}">
-                        <a16:creationId xmlns:a16="http://schemas.microsoft.com/office/drawing/2014/main" id="{B7AFC01D-F26F-C653-0C82-DD8D900BCFD7}"/>
-                      </a:ext>
-                    </a:extLst>
-                  </p:cNvPr>
-                  <p:cNvSpPr txBox="1"/>
-                  <p:nvPr/>
-                </p:nvSpPr>
-                <p:spPr>
-                  <a:xfrm>
-                    <a:off x="2451317" y="2737211"/>
-                    <a:ext cx="561116" cy="208455"/>
-                  </a:xfrm>
-                  <a:prstGeom prst="rect">
-                    <a:avLst/>
-                  </a:prstGeom>
-                  <a:noFill/>
-                </p:spPr>
-                <p:txBody>
-                  <a:bodyPr wrap="square" lIns="0" tIns="0" rIns="0" bIns="0" rtlCol="0">
-                    <a:spAutoFit/>
-                  </a:bodyPr>
-                  <a:lstStyle/>
-                  <a:p>
-                    <a:pPr/>
-                    <a14:m>
-                      <m:oMathPara xmlns:m="http://schemas.openxmlformats.org/officeDocument/2006/math">
-                        <m:oMathParaPr>
-                          <m:jc m:val="centerGroup"/>
-                        </m:oMathParaPr>
-                        <m:oMath xmlns:m="http://schemas.openxmlformats.org/officeDocument/2006/math">
-                          <m:r>
-                            <a:rPr lang="de-DE" sz="1200" i="1" smtClean="0">
-                              <a:latin typeface="Cambria Math" panose="02040503050406030204" pitchFamily="18" charset="0"/>
-                            </a:rPr>
-                            <m:t>𝑔</m:t>
                           </m:r>
                           <m:d>
                             <m:dPr>
@@ -4111,281 +4032,318 @@
                                 <a:rPr lang="de-DE" sz="1200" i="1">
                                   <a:latin typeface="Cambria Math" panose="02040503050406030204" pitchFamily="18" charset="0"/>
                                 </a:rPr>
-                                <m:t>𝑓</m:t>
+                                <m:t>𝑥</m:t>
                               </m:r>
-                              <m:d>
-                                <m:dPr>
-                                  <m:ctrlPr>
-                                    <a:rPr lang="de-DE" sz="1200" i="1">
-                                      <a:latin typeface="Cambria Math" panose="02040503050406030204" pitchFamily="18" charset="0"/>
-                                    </a:rPr>
-                                  </m:ctrlPr>
-                                </m:dPr>
-                                <m:e>
-                                  <m:r>
-                                    <a:rPr lang="de-DE" sz="1200" i="1">
-                                      <a:latin typeface="Cambria Math" panose="02040503050406030204" pitchFamily="18" charset="0"/>
-                                    </a:rPr>
-                                    <m:t>𝑥</m:t>
-                                  </m:r>
-                                </m:e>
-                              </m:d>
                             </m:e>
                           </m:d>
-                        </m:oMath>
-                      </m:oMathPara>
-                    </a14:m>
-                    <a:endParaRPr lang="de-DE" sz="1200" dirty="0"/>
-                  </a:p>
-                </p:txBody>
-              </p:sp>
-            </mc:Choice>
-            <mc:Fallback>
-              <p:sp>
-                <p:nvSpPr>
-                  <p:cNvPr id="19" name="Textfeld 18">
-                    <a:extLst>
-                      <a:ext uri="{FF2B5EF4-FFF2-40B4-BE49-F238E27FC236}">
-                        <a16:creationId xmlns:a16="http://schemas.microsoft.com/office/drawing/2014/main" id="{B7AFC01D-F26F-C653-0C82-DD8D900BCFD7}"/>
-                      </a:ext>
-                    </a:extLst>
-                  </p:cNvPr>
-                  <p:cNvSpPr txBox="1">
-                    <a:spLocks noRot="1" noChangeAspect="1" noMove="1" noResize="1" noEditPoints="1" noAdjustHandles="1" noChangeArrowheads="1" noChangeShapeType="1" noTextEdit="1"/>
-                  </p:cNvSpPr>
-                  <p:nvPr/>
-                </p:nvSpPr>
-                <p:spPr>
-                  <a:xfrm>
-                    <a:off x="2451317" y="2737211"/>
-                    <a:ext cx="561116" cy="208455"/>
-                  </a:xfrm>
-                  <a:prstGeom prst="rect">
-                    <a:avLst/>
-                  </a:prstGeom>
-                  <a:blipFill>
-                    <a:blip r:embed="rId20"/>
-                    <a:stretch>
-                      <a:fillRect l="-7609" b="-26471"/>
-                    </a:stretch>
-                  </a:blipFill>
-                </p:spPr>
-                <p:txBody>
-                  <a:bodyPr/>
-                  <a:lstStyle/>
-                  <a:p>
-                    <a:r>
-                      <a:rPr lang="de-DE">
-                        <a:noFill/>
-                      </a:rPr>
-                      <a:t> </a:t>
-                    </a:r>
-                  </a:p>
-                </p:txBody>
-              </p:sp>
-            </mc:Fallback>
-          </mc:AlternateContent>
-          <mc:AlternateContent xmlns:mc="http://schemas.openxmlformats.org/markup-compatibility/2006">
-            <mc:Choice xmlns:a14="http://schemas.microsoft.com/office/drawing/2010/main" Requires="a14">
-              <p:sp>
-                <p:nvSpPr>
-                  <p:cNvPr id="23" name="Textfeld 22">
-                    <a:extLst>
-                      <a:ext uri="{FF2B5EF4-FFF2-40B4-BE49-F238E27FC236}">
-                        <a16:creationId xmlns:a16="http://schemas.microsoft.com/office/drawing/2014/main" id="{6269BAE7-F830-A508-E35E-E3B787A6450A}"/>
-                      </a:ext>
-                    </a:extLst>
-                  </p:cNvPr>
-                  <p:cNvSpPr txBox="1"/>
-                  <p:nvPr/>
-                </p:nvSpPr>
-                <p:spPr>
-                  <a:xfrm>
-                    <a:off x="1406569" y="1269534"/>
-                    <a:ext cx="1868311" cy="261610"/>
-                  </a:xfrm>
-                  <a:prstGeom prst="rect">
-                    <a:avLst/>
-                  </a:prstGeom>
-                  <a:solidFill>
-                    <a:schemeClr val="bg1"/>
-                  </a:solidFill>
-                </p:spPr>
-                <p:txBody>
-                  <a:bodyPr wrap="square">
-                    <a:spAutoFit/>
-                  </a:bodyPr>
-                  <a:lstStyle/>
-                  <a:p>
-                    <a:pPr/>
-                    <a14:m>
-                      <m:oMathPara xmlns:m="http://schemas.openxmlformats.org/officeDocument/2006/math">
-                        <m:oMathParaPr>
-                          <m:jc m:val="centerGroup"/>
-                        </m:oMathParaPr>
-                        <m:oMath xmlns:m="http://schemas.openxmlformats.org/officeDocument/2006/math">
+                        </m:e>
+                      </m:d>
+                    </m:oMath>
+                  </m:oMathPara>
+                </a14:m>
+                <a:endParaRPr lang="de-DE" sz="1200" dirty="0"/>
+              </a:p>
+            </p:txBody>
+          </p:sp>
+        </mc:Choice>
+        <mc:Fallback>
+          <p:sp>
+            <p:nvSpPr>
+              <p:cNvPr id="19" name="Textfeld 18">
+                <a:extLst>
+                  <a:ext uri="{FF2B5EF4-FFF2-40B4-BE49-F238E27FC236}">
+                    <a16:creationId xmlns:a16="http://schemas.microsoft.com/office/drawing/2014/main" id="{B7AFC01D-F26F-C653-0C82-DD8D900BCFD7}"/>
+                  </a:ext>
+                </a:extLst>
+              </p:cNvPr>
+              <p:cNvSpPr txBox="1">
+                <a:spLocks noRot="1" noChangeAspect="1" noMove="1" noResize="1" noEditPoints="1" noAdjustHandles="1" noChangeArrowheads="1" noChangeShapeType="1" noTextEdit="1"/>
+              </p:cNvSpPr>
+              <p:nvPr/>
+            </p:nvSpPr>
+            <p:spPr>
+              <a:xfrm>
+                <a:off x="2515389" y="2001572"/>
+                <a:ext cx="561116" cy="208455"/>
+              </a:xfrm>
+              <a:prstGeom prst="rect">
+                <a:avLst/>
+              </a:prstGeom>
+              <a:blipFill>
+                <a:blip r:embed="rId9"/>
+                <a:stretch>
+                  <a:fillRect l="-7609" b="-22857"/>
+                </a:stretch>
+              </a:blipFill>
+            </p:spPr>
+            <p:txBody>
+              <a:bodyPr/>
+              <a:lstStyle/>
+              <a:p>
+                <a:r>
+                  <a:rPr lang="de-DE">
+                    <a:noFill/>
+                  </a:rPr>
+                  <a:t> </a:t>
+                </a:r>
+              </a:p>
+            </p:txBody>
+          </p:sp>
+        </mc:Fallback>
+      </mc:AlternateContent>
+      <p:sp>
+        <p:nvSpPr>
+          <p:cNvPr id="30" name="Bogen 29">
+            <a:extLst>
+              <a:ext uri="{FF2B5EF4-FFF2-40B4-BE49-F238E27FC236}">
+                <a16:creationId xmlns:a16="http://schemas.microsoft.com/office/drawing/2014/main" id="{E9E14337-9DEB-CBFF-D647-0DB78B38E22D}"/>
+              </a:ext>
+            </a:extLst>
+          </p:cNvPr>
+          <p:cNvSpPr/>
+          <p:nvPr/>
+        </p:nvSpPr>
+        <p:spPr>
+          <a:xfrm>
+            <a:off x="-886038" y="485736"/>
+            <a:ext cx="3685822" cy="2684391"/>
+          </a:xfrm>
+          <a:prstGeom prst="arc">
+            <a:avLst>
+              <a:gd name="adj1" fmla="val 16200000"/>
+              <a:gd name="adj2" fmla="val 239328"/>
+            </a:avLst>
+          </a:prstGeom>
+          <a:ln w="3175">
+            <a:solidFill>
+              <a:schemeClr val="tx1"/>
+            </a:solidFill>
+            <a:headEnd type="none" w="med" len="med"/>
+            <a:tailEnd type="triangle" w="med" len="med"/>
+          </a:ln>
+        </p:spPr>
+        <p:style>
+          <a:lnRef idx="2">
+            <a:schemeClr val="accent1"/>
+          </a:lnRef>
+          <a:fillRef idx="0">
+            <a:schemeClr val="accent1"/>
+          </a:fillRef>
+          <a:effectRef idx="1">
+            <a:schemeClr val="accent1"/>
+          </a:effectRef>
+          <a:fontRef idx="minor">
+            <a:schemeClr val="tx1"/>
+          </a:fontRef>
+        </p:style>
+        <p:txBody>
+          <a:bodyPr rtlCol="0" anchor="ctr"/>
+          <a:lstStyle/>
+          <a:p>
+            <a:pPr algn="ctr"/>
+            <a:endParaRPr lang="de-DE"/>
+          </a:p>
+        </p:txBody>
+      </p:sp>
+      <mc:AlternateContent xmlns:mc="http://schemas.openxmlformats.org/markup-compatibility/2006">
+        <mc:Choice xmlns:a14="http://schemas.microsoft.com/office/drawing/2010/main" Requires="a14">
+          <p:sp>
+            <p:nvSpPr>
+              <p:cNvPr id="23" name="Textfeld 22">
+                <a:extLst>
+                  <a:ext uri="{FF2B5EF4-FFF2-40B4-BE49-F238E27FC236}">
+                    <a16:creationId xmlns:a16="http://schemas.microsoft.com/office/drawing/2014/main" id="{6269BAE7-F830-A508-E35E-E3B787A6450A}"/>
+                  </a:ext>
+                </a:extLst>
+              </p:cNvPr>
+              <p:cNvSpPr txBox="1"/>
+              <p:nvPr/>
+            </p:nvSpPr>
+            <p:spPr>
+              <a:xfrm>
+                <a:off x="1264470" y="512809"/>
+                <a:ext cx="1868311" cy="261610"/>
+              </a:xfrm>
+              <a:prstGeom prst="rect">
+                <a:avLst/>
+              </a:prstGeom>
+              <a:solidFill>
+                <a:schemeClr val="bg1"/>
+              </a:solidFill>
+            </p:spPr>
+            <p:txBody>
+              <a:bodyPr wrap="square">
+                <a:spAutoFit/>
+              </a:bodyPr>
+              <a:lstStyle/>
+              <a:p>
+                <a:pPr/>
+                <a14:m>
+                  <m:oMathPara xmlns:m="http://schemas.openxmlformats.org/officeDocument/2006/math">
+                    <m:oMathParaPr>
+                      <m:jc m:val="centerGroup"/>
+                    </m:oMathParaPr>
+                    <m:oMath xmlns:m="http://schemas.openxmlformats.org/officeDocument/2006/math">
+                      <m:r>
+                        <a:rPr lang="de-DE" sz="1100" i="1" smtClean="0">
+                          <a:latin typeface="Cambria Math" panose="02040503050406030204" pitchFamily="18" charset="0"/>
+                        </a:rPr>
+                        <m:t>𝑔</m:t>
+                      </m:r>
+                      <m:r>
+                        <a:rPr lang="de-DE" sz="1100" i="1" smtClean="0">
+                          <a:latin typeface="Cambria Math" panose="02040503050406030204" pitchFamily="18" charset="0"/>
+                        </a:rPr>
+                        <m:t>∘</m:t>
+                      </m:r>
+                      <m:r>
+                        <a:rPr lang="de-DE" sz="1100" i="1" smtClean="0">
+                          <a:latin typeface="Cambria Math" panose="02040503050406030204" pitchFamily="18" charset="0"/>
+                        </a:rPr>
+                        <m:t>𝑓</m:t>
+                      </m:r>
+                      <m:r>
+                        <a:rPr lang="de-DE" sz="1100" i="1" smtClean="0">
+                          <a:latin typeface="Cambria Math" panose="02040503050406030204" pitchFamily="18" charset="0"/>
+                        </a:rPr>
+                        <m:t>:</m:t>
+                      </m:r>
+                      <m:r>
+                        <a:rPr lang="de-DE" sz="1100" i="1" smtClean="0">
+                          <a:latin typeface="Cambria Math" panose="02040503050406030204" pitchFamily="18" charset="0"/>
+                        </a:rPr>
+                        <m:t>𝐷</m:t>
+                      </m:r>
+                      <m:r>
+                        <a:rPr lang="de-DE" sz="1100" i="1" smtClean="0">
+                          <a:latin typeface="Cambria Math" panose="02040503050406030204" pitchFamily="18" charset="0"/>
+                        </a:rPr>
+                        <m:t>→</m:t>
+                      </m:r>
+                      <m:r>
+                        <a:rPr lang="de-DE" sz="1100" i="1" smtClean="0">
+                          <a:latin typeface="Cambria Math" panose="02040503050406030204" pitchFamily="18" charset="0"/>
+                        </a:rPr>
+                        <m:t>𝑆</m:t>
+                      </m:r>
+                      <m:r>
+                        <a:rPr lang="de-DE" sz="1100" i="1" smtClean="0">
+                          <a:latin typeface="Cambria Math" panose="02040503050406030204" pitchFamily="18" charset="0"/>
+                        </a:rPr>
+                        <m:t>, </m:t>
+                      </m:r>
+                      <m:r>
+                        <a:rPr lang="de-DE" sz="1100" i="1" smtClean="0">
+                          <a:latin typeface="Cambria Math" panose="02040503050406030204" pitchFamily="18" charset="0"/>
+                        </a:rPr>
+                        <m:t>𝑥</m:t>
+                      </m:r>
+                      <m:r>
+                        <a:rPr lang="de-DE" sz="1100" i="1" smtClean="0">
+                          <a:latin typeface="Cambria Math" panose="02040503050406030204" pitchFamily="18" charset="0"/>
+                        </a:rPr>
+                        <m:t>↦</m:t>
+                      </m:r>
+                      <m:d>
+                        <m:dPr>
+                          <m:ctrlPr>
+                            <a:rPr lang="de-DE" sz="1100" i="1">
+                              <a:latin typeface="Cambria Math" panose="02040503050406030204" pitchFamily="18" charset="0"/>
+                            </a:rPr>
+                          </m:ctrlPr>
+                        </m:dPr>
+                        <m:e>
                           <m:r>
-                            <a:rPr lang="de-DE" sz="1100" i="1" smtClean="0">
+                            <a:rPr lang="de-DE" sz="1100" i="1">
                               <a:latin typeface="Cambria Math" panose="02040503050406030204" pitchFamily="18" charset="0"/>
                             </a:rPr>
                             <m:t>𝑔</m:t>
                           </m:r>
                           <m:r>
-                            <a:rPr lang="de-DE" sz="1100" i="1" smtClean="0">
+                            <a:rPr lang="de-DE" sz="1100" i="1">
                               <a:latin typeface="Cambria Math" panose="02040503050406030204" pitchFamily="18" charset="0"/>
                             </a:rPr>
                             <m:t>∘</m:t>
                           </m:r>
                           <m:r>
-                            <a:rPr lang="de-DE" sz="1100" i="1" smtClean="0">
+                            <a:rPr lang="de-DE" sz="1100" i="1">
                               <a:latin typeface="Cambria Math" panose="02040503050406030204" pitchFamily="18" charset="0"/>
                             </a:rPr>
                             <m:t>𝑓</m:t>
                           </m:r>
-                          <m:r>
-                            <a:rPr lang="de-DE" sz="1100" i="1" smtClean="0">
-                              <a:latin typeface="Cambria Math" panose="02040503050406030204" pitchFamily="18" charset="0"/>
-                            </a:rPr>
-                            <m:t>:</m:t>
-                          </m:r>
-                          <m:r>
-                            <a:rPr lang="de-DE" sz="1100" i="1" smtClean="0">
-                              <a:latin typeface="Cambria Math" panose="02040503050406030204" pitchFamily="18" charset="0"/>
-                            </a:rPr>
-                            <m:t>𝐷</m:t>
-                          </m:r>
-                          <m:r>
-                            <a:rPr lang="de-DE" sz="1100" i="1" smtClean="0">
-                              <a:latin typeface="Cambria Math" panose="02040503050406030204" pitchFamily="18" charset="0"/>
-                            </a:rPr>
-                            <m:t>→</m:t>
-                          </m:r>
-                          <m:r>
-                            <a:rPr lang="de-DE" sz="1100" i="1" smtClean="0">
-                              <a:latin typeface="Cambria Math" panose="02040503050406030204" pitchFamily="18" charset="0"/>
-                            </a:rPr>
-                            <m:t>𝑆</m:t>
-                          </m:r>
-                          <m:r>
-                            <a:rPr lang="de-DE" sz="1100" i="1" smtClean="0">
-                              <a:latin typeface="Cambria Math" panose="02040503050406030204" pitchFamily="18" charset="0"/>
-                            </a:rPr>
-                            <m:t>, </m:t>
-                          </m:r>
-                          <m:r>
-                            <a:rPr lang="de-DE" sz="1100" i="1" smtClean="0">
-                              <a:latin typeface="Cambria Math" panose="02040503050406030204" pitchFamily="18" charset="0"/>
-                            </a:rPr>
-                            <m:t>𝑥</m:t>
-                          </m:r>
-                          <m:r>
-                            <a:rPr lang="de-DE" sz="1100" i="1" smtClean="0">
-                              <a:latin typeface="Cambria Math" panose="02040503050406030204" pitchFamily="18" charset="0"/>
-                            </a:rPr>
-                            <m:t>↦</m:t>
-                          </m:r>
-                          <m:d>
-                            <m:dPr>
-                              <m:ctrlPr>
-                                <a:rPr lang="de-DE" sz="1100" i="1">
-                                  <a:latin typeface="Cambria Math" panose="02040503050406030204" pitchFamily="18" charset="0"/>
-                                </a:rPr>
-                              </m:ctrlPr>
-                            </m:dPr>
-                            <m:e>
-                              <m:r>
-                                <a:rPr lang="de-DE" sz="1100" i="1">
-                                  <a:latin typeface="Cambria Math" panose="02040503050406030204" pitchFamily="18" charset="0"/>
-                                </a:rPr>
-                                <m:t>𝑔</m:t>
-                              </m:r>
-                              <m:r>
-                                <a:rPr lang="de-DE" sz="1100" i="1">
-                                  <a:latin typeface="Cambria Math" panose="02040503050406030204" pitchFamily="18" charset="0"/>
-                                </a:rPr>
-                                <m:t>∘</m:t>
-                              </m:r>
-                              <m:r>
-                                <a:rPr lang="de-DE" sz="1100" i="1">
-                                  <a:latin typeface="Cambria Math" panose="02040503050406030204" pitchFamily="18" charset="0"/>
-                                </a:rPr>
-                                <m:t>𝑓</m:t>
-                              </m:r>
-                            </m:e>
-                          </m:d>
-                          <m:r>
-                            <a:rPr lang="de-DE" sz="1100" i="1">
-                              <a:latin typeface="Cambria Math" panose="02040503050406030204" pitchFamily="18" charset="0"/>
-                            </a:rPr>
-                            <m:t>(</m:t>
-                          </m:r>
-                          <m:r>
-                            <a:rPr lang="de-DE" sz="1100" i="1">
-                              <a:latin typeface="Cambria Math" panose="02040503050406030204" pitchFamily="18" charset="0"/>
-                            </a:rPr>
-                            <m:t>𝑥</m:t>
-                          </m:r>
-                          <m:r>
-                            <a:rPr lang="de-DE" sz="1100" i="1">
-                              <a:latin typeface="Cambria Math" panose="02040503050406030204" pitchFamily="18" charset="0"/>
-                            </a:rPr>
-                            <m:t>)</m:t>
-                          </m:r>
-                        </m:oMath>
-                      </m:oMathPara>
-                    </a14:m>
-                    <a:endParaRPr lang="de-DE" sz="1100" dirty="0"/>
-                  </a:p>
-                </p:txBody>
-              </p:sp>
-            </mc:Choice>
-            <mc:Fallback>
-              <p:sp>
-                <p:nvSpPr>
-                  <p:cNvPr id="23" name="Textfeld 22">
-                    <a:extLst>
-                      <a:ext uri="{FF2B5EF4-FFF2-40B4-BE49-F238E27FC236}">
-                        <a16:creationId xmlns:a16="http://schemas.microsoft.com/office/drawing/2014/main" id="{6269BAE7-F830-A508-E35E-E3B787A6450A}"/>
-                      </a:ext>
-                    </a:extLst>
-                  </p:cNvPr>
-                  <p:cNvSpPr txBox="1">
-                    <a:spLocks noRot="1" noChangeAspect="1" noMove="1" noResize="1" noEditPoints="1" noAdjustHandles="1" noChangeArrowheads="1" noChangeShapeType="1" noTextEdit="1"/>
-                  </p:cNvSpPr>
-                  <p:nvPr/>
-                </p:nvSpPr>
-                <p:spPr>
-                  <a:xfrm>
-                    <a:off x="1406569" y="1269534"/>
-                    <a:ext cx="1868311" cy="261610"/>
-                  </a:xfrm>
-                  <a:prstGeom prst="rect">
-                    <a:avLst/>
-                  </a:prstGeom>
-                  <a:blipFill>
-                    <a:blip r:embed="rId21"/>
-                    <a:stretch>
-                      <a:fillRect b="-4651"/>
-                    </a:stretch>
-                  </a:blipFill>
-                </p:spPr>
-                <p:txBody>
-                  <a:bodyPr/>
-                  <a:lstStyle/>
-                  <a:p>
-                    <a:r>
-                      <a:rPr lang="de-DE">
-                        <a:noFill/>
-                      </a:rPr>
-                      <a:t> </a:t>
-                    </a:r>
-                  </a:p>
-                </p:txBody>
-              </p:sp>
-            </mc:Fallback>
-          </mc:AlternateContent>
-        </p:grpSp>
-      </p:grpSp>
+                        </m:e>
+                      </m:d>
+                      <m:r>
+                        <a:rPr lang="de-DE" sz="1100" i="1">
+                          <a:latin typeface="Cambria Math" panose="02040503050406030204" pitchFamily="18" charset="0"/>
+                        </a:rPr>
+                        <m:t>(</m:t>
+                      </m:r>
+                      <m:r>
+                        <a:rPr lang="de-DE" sz="1100" i="1">
+                          <a:latin typeface="Cambria Math" panose="02040503050406030204" pitchFamily="18" charset="0"/>
+                        </a:rPr>
+                        <m:t>𝑥</m:t>
+                      </m:r>
+                      <m:r>
+                        <a:rPr lang="de-DE" sz="1100" i="1">
+                          <a:latin typeface="Cambria Math" panose="02040503050406030204" pitchFamily="18" charset="0"/>
+                        </a:rPr>
+                        <m:t>)</m:t>
+                      </m:r>
+                    </m:oMath>
+                  </m:oMathPara>
+                </a14:m>
+                <a:endParaRPr lang="de-DE" sz="1100" dirty="0"/>
+              </a:p>
+            </p:txBody>
+          </p:sp>
+        </mc:Choice>
+        <mc:Fallback>
+          <p:sp>
+            <p:nvSpPr>
+              <p:cNvPr id="23" name="Textfeld 22">
+                <a:extLst>
+                  <a:ext uri="{FF2B5EF4-FFF2-40B4-BE49-F238E27FC236}">
+                    <a16:creationId xmlns:a16="http://schemas.microsoft.com/office/drawing/2014/main" id="{6269BAE7-F830-A508-E35E-E3B787A6450A}"/>
+                  </a:ext>
+                </a:extLst>
+              </p:cNvPr>
+              <p:cNvSpPr txBox="1">
+                <a:spLocks noRot="1" noChangeAspect="1" noMove="1" noResize="1" noEditPoints="1" noAdjustHandles="1" noChangeArrowheads="1" noChangeShapeType="1" noTextEdit="1"/>
+              </p:cNvSpPr>
+              <p:nvPr/>
+            </p:nvSpPr>
+            <p:spPr>
+              <a:xfrm>
+                <a:off x="1264470" y="512809"/>
+                <a:ext cx="1868311" cy="261610"/>
+              </a:xfrm>
+              <a:prstGeom prst="rect">
+                <a:avLst/>
+              </a:prstGeom>
+              <a:blipFill>
+                <a:blip r:embed="rId10"/>
+                <a:stretch>
+                  <a:fillRect b="-4651"/>
+                </a:stretch>
+              </a:blipFill>
+            </p:spPr>
+            <p:txBody>
+              <a:bodyPr/>
+              <a:lstStyle/>
+              <a:p>
+                <a:r>
+                  <a:rPr lang="de-DE">
+                    <a:noFill/>
+                  </a:rPr>
+                  <a:t> </a:t>
+                </a:r>
+              </a:p>
+            </p:txBody>
+          </p:sp>
+        </mc:Fallback>
+      </mc:AlternateContent>
     </p:spTree>
     <p:extLst>
       <p:ext uri="{BB962C8B-B14F-4D97-AF65-F5344CB8AC3E}">
